--- a/courses/learn_floorplanning/module02-03-bstar-tree/slides.pptx
+++ b/courses/learn_floorplanning/module02-03-bstar-tree/slides.pptx
@@ -11,6 +11,10 @@
     <p:sldId id="259" r:id="rId11"/>
     <p:sldId id="260" r:id="rId12"/>
     <p:sldId id="261" r:id="rId13"/>
+    <p:sldId id="262" r:id="rId14"/>
+    <p:sldId id="263" r:id="rId15"/>
+    <p:sldId id="264" r:id="rId16"/>
+    <p:sldId id="265" r:id="rId17"/>
   </p:sldIdLst>
   <p:sldSz cx="12191695" cy="6858000" type="screen4x3"/>
   <p:notesSz cx="6858000" cy="9144000"/>
@@ -507,7 +511,83 @@
           <a:lstStyle/>
           <a:p>
             <a:r>
-              <a:t>B*-trees are a popular compacted floorplan representation. Each node is a module. The left child sits to the right of its parent; the right child sits above—under the usual contour packing rules. From the tree you reconstruct coordinates without storing every x and y explicitly.</a:t>
+              <a:t>B-star stores packing adjacency: left child sits right-of the parent; right child sits above on a contour. Root A at the origin; left chain B then C then E; right child D above A.</a:t>
+            </a:r>
+          </a:p>
+          <a:p/>
+          <a:p>
+            <a:r>
+              <a:t>&lt;!-- algorithm-walkthrough --&gt;</a:t>
+            </a:r>
+          </a:p>
+        </p:txBody>
+      </p:sp>
+      <p:sp>
+        <p:nvSpPr>
+          <p:cNvPr id="4" name="Slide Number Placeholder 3"/>
+          <p:cNvSpPr>
+            <a:spLocks noGrp="1"/>
+          </p:cNvSpPr>
+          <p:nvPr>
+            <p:ph type="sldNum" idx="5" sz="quarter"/>
+          </p:nvPr>
+        </p:nvSpPr>
+        <p:spPr/>
+      </p:sp>
+    </p:spTree>
+  </p:cSld>
+  <p:clrMapOvr>
+    <a:masterClrMapping/>
+  </p:clrMapOvr>
+</p:notes>
+</file>
+
+<file path=ppt/notesSlides/notesSlide10.xml><?xml version="1.0" encoding="utf-8"?>
+<p:notes xmlns:a="http://schemas.openxmlformats.org/drawingml/2006/main" xmlns:p="http://schemas.openxmlformats.org/presentationml/2006/main" xmlns:r="http://schemas.openxmlformats.org/officeDocument/2006/relationships">
+  <p:cSld>
+    <p:spTree>
+      <p:nvGrpSpPr>
+        <p:cNvPr id="1" name=""/>
+        <p:cNvGrpSpPr/>
+        <p:nvPr/>
+      </p:nvGrpSpPr>
+      <p:grpSpPr>
+        <a:xfrm>
+          <a:off x="0" y="0"/>
+          <a:ext cx="0" cy="0"/>
+          <a:chOff x="0" y="0"/>
+          <a:chExt cx="0" cy="0"/>
+        </a:xfrm>
+      </p:grpSpPr>
+      <p:sp>
+        <p:nvSpPr>
+          <p:cNvPr id="2" name="Slide Image Placeholder 1"/>
+          <p:cNvSpPr>
+            <a:spLocks noGrp="1"/>
+          </p:cNvSpPr>
+          <p:nvPr>
+            <p:ph type="sldImg" idx="2"/>
+          </p:nvPr>
+        </p:nvSpPr>
+        <p:spPr/>
+      </p:sp>
+      <p:sp>
+        <p:nvSpPr>
+          <p:cNvPr id="3" name="Notes Placeholder 2"/>
+          <p:cNvSpPr>
+            <a:spLocks noGrp="1"/>
+          </p:cNvSpPr>
+          <p:nvPr>
+            <p:ph type="body" idx="3" sz="quarter"/>
+          </p:nvPr>
+        </p:nvSpPr>
+        <p:spPr/>
+        <p:txBody>
+          <a:bodyPr/>
+          <a:lstStyle/>
+          <a:p>
+            <a:r>
+              <a:t>Produce the legal B-star packing. Next: sequence-pair permutations as another encoding.</a:t>
             </a:r>
           </a:p>
         </p:txBody>
@@ -577,7 +657,7 @@
           <a:lstStyle/>
           <a:p>
             <a:r>
-              <a:t>Root at the lower-left. Walking left children grows the packing rightward; right children grow upward along a contour of previously placed blocks. Packing is typically done with a horizontal contour so y coordinates stay compacted. Perturbing the tree—rotate, move, swap—yields neighboring packings for annealing later.</a:t>
+              <a:t>B-star packing places the root at the lower left. A lands at zero comma zero with size three by two. Left children go right-of; right children go above via the contour.</a:t>
             </a:r>
           </a:p>
         </p:txBody>
@@ -647,7 +727,7 @@
           <a:lstStyle/>
           <a:p>
             <a:r>
-              <a:t>Open **bstar-tree**. Load a starter tree over A–E. Step placement: parent, left child, right child. Watch modules land left/right/above as the contour updates. Inspect outline legality and deadspace. Then code the same left/right packing rules.</a:t>
+              <a:t>The left spine walks rightward: B at x equals three, then C, then E. Contour heights track the skyline so later modules sit tightly.</a:t>
             </a:r>
           </a:p>
         </p:txBody>
@@ -717,7 +797,7 @@
           <a:lstStyle/>
           <a:p>
             <a:r>
-              <a:t>Build a B*-tree for the tiny modules. Implement contour-based packing to emit (x, y, w, h). Verify non-overlap and outline containment. Print the tree in a readable parenthesized form so goldens are reviewable. Prefer deterministic child ordering for tests.</a:t>
+              <a:t>D is the right child of A, so it packs above A on the contour. Its y is at least two—A's height—keeping the tree geometry honest.</a:t>
             </a:r>
           </a:p>
         </p:txBody>
@@ -787,7 +867,7 @@
           <a:lstStyle/>
           <a:p>
             <a:r>
-              <a:t>Getting left/right geometry backwards is the number-one bug. Contour updates that forget deleted segments leave modules floating or overlapping. Don’t confuse B*-tree adjacency with netlist adjacency—the tree is a packing code, not connectivity.</a:t>
+              <a:t>All five modules are placed. The packing is legal inside ten by eight. Perturbing the tree—swap, rotate, move—will feed simulated annealing later.</a:t>
             </a:r>
           </a:p>
         </p:txBody>
@@ -857,7 +937,223 @@
           <a:lstStyle/>
           <a:p>
             <a:r>
-              <a:t>Produce a legal B*-tree packing inside the outline. Next: sequence pairs—another classic encoding with positive and negative sequences.</a:t>
+              <a:t>B-star stores adjacency for packing, not connectivity. Get left and right semantics right, keep the contour correct, and you have a fast neighbor generator for search.</a:t>
+            </a:r>
+          </a:p>
+          <a:p/>
+          <a:p>
+            <a:r>
+              <a:t>&lt;!-- /algorithm-walkthrough --&gt;</a:t>
+            </a:r>
+          </a:p>
+        </p:txBody>
+      </p:sp>
+      <p:sp>
+        <p:nvSpPr>
+          <p:cNvPr id="4" name="Slide Number Placeholder 3"/>
+          <p:cNvSpPr>
+            <a:spLocks noGrp="1"/>
+          </p:cNvSpPr>
+          <p:nvPr>
+            <p:ph type="sldNum" idx="5" sz="quarter"/>
+          </p:nvPr>
+        </p:nvSpPr>
+        <p:spPr/>
+      </p:sp>
+    </p:spTree>
+  </p:cSld>
+  <p:clrMapOvr>
+    <a:masterClrMapping/>
+  </p:clrMapOvr>
+</p:notes>
+</file>
+
+<file path=ppt/notesSlides/notesSlide7.xml><?xml version="1.0" encoding="utf-8"?>
+<p:notes xmlns:a="http://schemas.openxmlformats.org/drawingml/2006/main" xmlns:p="http://schemas.openxmlformats.org/presentationml/2006/main" xmlns:r="http://schemas.openxmlformats.org/officeDocument/2006/relationships">
+  <p:cSld>
+    <p:spTree>
+      <p:nvGrpSpPr>
+        <p:cNvPr id="1" name=""/>
+        <p:cNvGrpSpPr/>
+        <p:nvPr/>
+      </p:nvGrpSpPr>
+      <p:grpSpPr>
+        <a:xfrm>
+          <a:off x="0" y="0"/>
+          <a:ext cx="0" cy="0"/>
+          <a:chOff x="0" y="0"/>
+          <a:chExt cx="0" cy="0"/>
+        </a:xfrm>
+      </p:grpSpPr>
+      <p:sp>
+        <p:nvSpPr>
+          <p:cNvPr id="2" name="Slide Image Placeholder 1"/>
+          <p:cNvSpPr>
+            <a:spLocks noGrp="1"/>
+          </p:cNvSpPr>
+          <p:nvPr>
+            <p:ph type="sldImg" idx="2"/>
+          </p:nvPr>
+        </p:nvSpPr>
+        <p:spPr/>
+      </p:sp>
+      <p:sp>
+        <p:nvSpPr>
+          <p:cNvPr id="3" name="Notes Placeholder 2"/>
+          <p:cNvSpPr>
+            <a:spLocks noGrp="1"/>
+          </p:cNvSpPr>
+          <p:nvPr>
+            <p:ph type="body" idx="3" sz="quarter"/>
+          </p:nvPr>
+        </p:nvSpPr>
+        <p:spPr/>
+        <p:txBody>
+          <a:bodyPr/>
+          <a:lstStyle/>
+          <a:p>
+            <a:r>
+              <a:t>Open bstar-tree and Pack B*-tree. Confirm A at zero comma zero, B at x equals three, D above A, and a legal five-module packing.</a:t>
+            </a:r>
+          </a:p>
+        </p:txBody>
+      </p:sp>
+      <p:sp>
+        <p:nvSpPr>
+          <p:cNvPr id="4" name="Slide Number Placeholder 3"/>
+          <p:cNvSpPr>
+            <a:spLocks noGrp="1"/>
+          </p:cNvSpPr>
+          <p:nvPr>
+            <p:ph type="sldNum" idx="5" sz="quarter"/>
+          </p:nvPr>
+        </p:nvSpPr>
+        <p:spPr/>
+      </p:sp>
+    </p:spTree>
+  </p:cSld>
+  <p:clrMapOvr>
+    <a:masterClrMapping/>
+  </p:clrMapOvr>
+</p:notes>
+</file>
+
+<file path=ppt/notesSlides/notesSlide8.xml><?xml version="1.0" encoding="utf-8"?>
+<p:notes xmlns:a="http://schemas.openxmlformats.org/drawingml/2006/main" xmlns:p="http://schemas.openxmlformats.org/presentationml/2006/main" xmlns:r="http://schemas.openxmlformats.org/officeDocument/2006/relationships">
+  <p:cSld>
+    <p:spTree>
+      <p:nvGrpSpPr>
+        <p:cNvPr id="1" name=""/>
+        <p:cNvGrpSpPr/>
+        <p:nvPr/>
+      </p:nvGrpSpPr>
+      <p:grpSpPr>
+        <a:xfrm>
+          <a:off x="0" y="0"/>
+          <a:ext cx="0" cy="0"/>
+          <a:chOff x="0" y="0"/>
+          <a:chExt cx="0" cy="0"/>
+        </a:xfrm>
+      </p:grpSpPr>
+      <p:sp>
+        <p:nvSpPr>
+          <p:cNvPr id="2" name="Slide Image Placeholder 1"/>
+          <p:cNvSpPr>
+            <a:spLocks noGrp="1"/>
+          </p:cNvSpPr>
+          <p:nvPr>
+            <p:ph type="sldImg" idx="2"/>
+          </p:nvPr>
+        </p:nvSpPr>
+        <p:spPr/>
+      </p:sp>
+      <p:sp>
+        <p:nvSpPr>
+          <p:cNvPr id="3" name="Notes Placeholder 2"/>
+          <p:cNvSpPr>
+            <a:spLocks noGrp="1"/>
+          </p:cNvSpPr>
+          <p:nvPr>
+            <p:ph type="body" idx="3" sz="quarter"/>
+          </p:nvPr>
+        </p:nvSpPr>
+        <p:spPr/>
+        <p:txBody>
+          <a:bodyPr/>
+          <a:lstStyle/>
+          <a:p>
+            <a:r>
+              <a:t>Build the golden tree and contour-pack it. Assert A at (0,0), B.x equals A.x plus A.w, D.y at least A.h, and legality true.</a:t>
+            </a:r>
+          </a:p>
+        </p:txBody>
+      </p:sp>
+      <p:sp>
+        <p:nvSpPr>
+          <p:cNvPr id="4" name="Slide Number Placeholder 3"/>
+          <p:cNvSpPr>
+            <a:spLocks noGrp="1"/>
+          </p:cNvSpPr>
+          <p:nvPr>
+            <p:ph type="sldNum" idx="5" sz="quarter"/>
+          </p:nvPr>
+        </p:nvSpPr>
+        <p:spPr/>
+      </p:sp>
+    </p:spTree>
+  </p:cSld>
+  <p:clrMapOvr>
+    <a:masterClrMapping/>
+  </p:clrMapOvr>
+</p:notes>
+</file>
+
+<file path=ppt/notesSlides/notesSlide9.xml><?xml version="1.0" encoding="utf-8"?>
+<p:notes xmlns:a="http://schemas.openxmlformats.org/drawingml/2006/main" xmlns:p="http://schemas.openxmlformats.org/presentationml/2006/main" xmlns:r="http://schemas.openxmlformats.org/officeDocument/2006/relationships">
+  <p:cSld>
+    <p:spTree>
+      <p:nvGrpSpPr>
+        <p:cNvPr id="1" name=""/>
+        <p:cNvGrpSpPr/>
+        <p:nvPr/>
+      </p:nvGrpSpPr>
+      <p:grpSpPr>
+        <a:xfrm>
+          <a:off x="0" y="0"/>
+          <a:ext cx="0" cy="0"/>
+          <a:chOff x="0" y="0"/>
+          <a:chExt cx="0" cy="0"/>
+        </a:xfrm>
+      </p:grpSpPr>
+      <p:sp>
+        <p:nvSpPr>
+          <p:cNvPr id="2" name="Slide Image Placeholder 1"/>
+          <p:cNvSpPr>
+            <a:spLocks noGrp="1"/>
+          </p:cNvSpPr>
+          <p:nvPr>
+            <p:ph type="sldImg" idx="2"/>
+          </p:nvPr>
+        </p:nvSpPr>
+        <p:spPr/>
+      </p:sp>
+      <p:sp>
+        <p:nvSpPr>
+          <p:cNvPr id="3" name="Notes Placeholder 2"/>
+          <p:cNvSpPr>
+            <a:spLocks noGrp="1"/>
+          </p:cNvSpPr>
+          <p:nvPr>
+            <p:ph type="body" idx="3" sz="quarter"/>
+          </p:nvPr>
+        </p:nvSpPr>
+        <p:spPr/>
+        <p:txBody>
+          <a:bodyPr/>
+          <a:lstStyle/>
+          <a:p>
+            <a:r>
+              <a:t>Reversing left/right geometry; stale contour segments; treating the tree as a netlist.</a:t>
             </a:r>
           </a:p>
         </p:txBody>
@@ -3900,7 +4196,7 @@
                 </a:solidFill>
                 <a:latin typeface="Calibri"/>
               </a:rPr>
-              <a:t>B*-tree floorplans</a:t>
+              <a:t>B*-tree floorplan representation</a:t>
             </a:r>
           </a:p>
           <a:p>
@@ -3919,7 +4215,7 @@
                 </a:solidFill>
                 <a:latin typeface="Calibri"/>
               </a:rPr>
-              <a:t>B*-trees are a popular compacted floorplan representation</a:t>
+              <a:t>B-star stores packing adjacency: left child sits right-of the parent; right child sits above on a contour</a:t>
             </a:r>
           </a:p>
         </p:txBody>
@@ -3927,6 +4223,169 @@
       <p:sp>
         <p:nvSpPr>
           <p:cNvPr id="3" name="TextBox 2"/>
+          <p:cNvSpPr txBox="1"/>
+          <p:nvPr/>
+        </p:nvSpPr>
+        <p:spPr>
+          <a:xfrm>
+            <a:off x="548640" y="6355080"/>
+            <a:ext cx="11064240" cy="320040"/>
+          </a:xfrm>
+          <a:prstGeom prst="rect">
+            <a:avLst/>
+          </a:prstGeom>
+          <a:noFill/>
+        </p:spPr>
+        <p:txBody>
+          <a:bodyPr wrap="square">
+            <a:noAutofit/>
+          </a:bodyPr>
+          <a:lstStyle/>
+          <a:p>
+            <a:pPr algn="r">
+              <a:lnSpc>
+                <a:spcPts val="2200"/>
+              </a:lnSpc>
+              <a:defRPr sz="1000" b="0">
+                <a:solidFill>
+                  <a:srgbClr val="666666"/>
+                </a:solidFill>
+                <a:latin typeface="Calibri"/>
+              </a:defRPr>
+            </a:pPr>
+            <a:r>
+              <a:t>learn_floorplanning — 03 bstar tree</a:t>
+            </a:r>
+          </a:p>
+        </p:txBody>
+      </p:sp>
+    </p:spTree>
+  </p:cSld>
+  <p:clrMapOvr>
+    <a:masterClrMapping/>
+  </p:clrMapOvr>
+</p:sld>
+</file>
+
+<file path=ppt/slides/slide10.xml><?xml version="1.0" encoding="utf-8"?>
+<p:sld xmlns:a="http://schemas.openxmlformats.org/drawingml/2006/main" xmlns:p="http://schemas.openxmlformats.org/presentationml/2006/main" xmlns:r="http://schemas.openxmlformats.org/officeDocument/2006/relationships">
+  <p:cSld>
+    <p:spTree>
+      <p:nvGrpSpPr>
+        <p:cNvPr id="1" name=""/>
+        <p:cNvGrpSpPr/>
+        <p:nvPr/>
+      </p:nvGrpSpPr>
+      <p:grpSpPr/>
+      <p:sp>
+        <p:nvSpPr>
+          <p:cNvPr id="2" name="TextBox 1"/>
+          <p:cNvSpPr txBox="1"/>
+          <p:nvPr/>
+        </p:nvSpPr>
+        <p:spPr>
+          <a:xfrm>
+            <a:off x="548640" y="411480"/>
+            <a:ext cx="11064240" cy="777240"/>
+          </a:xfrm>
+          <a:prstGeom prst="rect">
+            <a:avLst/>
+          </a:prstGeom>
+          <a:noFill/>
+        </p:spPr>
+        <p:txBody>
+          <a:bodyPr wrap="square">
+            <a:noAutofit/>
+          </a:bodyPr>
+          <a:lstStyle/>
+          <a:p>
+            <a:pPr>
+              <a:lnSpc>
+                <a:spcPts val="2200"/>
+              </a:lnSpc>
+            </a:pPr>
+            <a:r>
+              <a:rPr sz="2800" b="1">
+                <a:solidFill>
+                  <a:srgbClr val="1A1A2E"/>
+                </a:solidFill>
+                <a:latin typeface="Calibri"/>
+              </a:rPr>
+              <a:t>Your turn</a:t>
+            </a:r>
+          </a:p>
+        </p:txBody>
+      </p:sp>
+      <p:sp>
+        <p:nvSpPr>
+          <p:cNvPr id="3" name="TextBox 2"/>
+          <p:cNvSpPr txBox="1"/>
+          <p:nvPr/>
+        </p:nvSpPr>
+        <p:spPr>
+          <a:xfrm>
+            <a:off x="548640" y="1234440"/>
+            <a:ext cx="11064240" cy="4937760"/>
+          </a:xfrm>
+          <a:prstGeom prst="rect">
+            <a:avLst/>
+          </a:prstGeom>
+          <a:noFill/>
+        </p:spPr>
+        <p:txBody>
+          <a:bodyPr wrap="square">
+            <a:noAutofit/>
+          </a:bodyPr>
+          <a:lstStyle/>
+          <a:p>
+            <a:pPr lvl="0" marL="457200" indent="-228600">
+              <a:buFont typeface="Calibri"/>
+              <a:spcAft>
+                <a:spcPts val="1000"/>
+              </a:spcAft>
+              <a:buSzPct val="100000"/>
+              <a:buChar char="•"/>
+              <a:lnSpc>
+                <a:spcPts val="2200"/>
+              </a:lnSpc>
+            </a:pPr>
+            <a:r>
+              <a:rPr sz="2000" b="0">
+                <a:solidFill>
+                  <a:srgbClr val="333333"/>
+                </a:solidFill>
+                <a:latin typeface="Calibri"/>
+              </a:rPr>
+              <a:t>Produce the legal B-star packing</a:t>
+            </a:r>
+          </a:p>
+          <a:p>
+            <a:pPr lvl="0" marL="457200" indent="-228600">
+              <a:buFont typeface="Calibri"/>
+              <a:spcAft>
+                <a:spcPts val="1000"/>
+              </a:spcAft>
+              <a:buSzPct val="100000"/>
+              <a:buChar char="•"/>
+              <a:lnSpc>
+                <a:spcPts val="2200"/>
+              </a:lnSpc>
+            </a:pPr>
+            <a:r>
+              <a:rPr sz="2000" b="0">
+                <a:solidFill>
+                  <a:srgbClr val="333333"/>
+                </a:solidFill>
+                <a:latin typeface="Calibri"/>
+              </a:rPr>
+              <a:t>Next: sequence-pair permutations as another encoding</a:t>
+            </a:r>
+          </a:p>
+        </p:txBody>
+      </p:sp>
+      <p:sp>
+        <p:nvSpPr>
+          <p:cNvPr id="4" name="TextBox 3"/>
           <p:cNvSpPr txBox="1"/>
           <p:nvPr/>
         </p:nvSpPr>
@@ -4015,21 +4474,45 @@
                 </a:solidFill>
                 <a:latin typeface="Calibri"/>
               </a:rPr>
-              <a:t>The idea</a:t>
-            </a:r>
-          </a:p>
-        </p:txBody>
-      </p:sp>
-      <p:sp>
-        <p:nvSpPr>
-          <p:cNvPr id="3" name="TextBox 2"/>
+              <a:t>Root A at the origin</a:t>
+            </a:r>
+          </a:p>
+        </p:txBody>
+      </p:sp>
+      <p:pic>
+        <p:nvPicPr>
+          <p:cNvPr id="3" name="Picture 2" descr="01-root.png"/>
+          <p:cNvPicPr>
+            <a:picLocks noChangeAspect="1"/>
+          </p:cNvPicPr>
+          <p:nvPr/>
+        </p:nvPicPr>
+        <p:blipFill>
+          <a:blip r:embed="rId2"/>
+          <a:stretch>
+            <a:fillRect/>
+          </a:stretch>
+        </p:blipFill>
+        <p:spPr>
+          <a:xfrm>
+            <a:off x="548640" y="1143000"/>
+            <a:ext cx="9424736" cy="4572000"/>
+          </a:xfrm>
+          <a:prstGeom prst="rect">
+            <a:avLst/>
+          </a:prstGeom>
+        </p:spPr>
+      </p:pic>
+      <p:sp>
+        <p:nvSpPr>
+          <p:cNvPr id="4" name="TextBox 3"/>
           <p:cNvSpPr txBox="1"/>
           <p:nvPr/>
         </p:nvSpPr>
         <p:spPr>
           <a:xfrm>
-            <a:off x="548640" y="1234440"/>
-            <a:ext cx="11064240" cy="4937760"/>
+            <a:off x="548640" y="5897880"/>
+            <a:ext cx="11064240" cy="411480"/>
           </a:xfrm>
           <a:prstGeom prst="rect">
             <a:avLst/>
@@ -4042,98 +4525,26 @@
           </a:bodyPr>
           <a:lstStyle/>
           <a:p>
-            <a:pPr lvl="0" marL="457200" indent="-228600">
-              <a:buFont typeface="Calibri"/>
-              <a:spcAft>
-                <a:spcPts val="1000"/>
-              </a:spcAft>
-              <a:buSzPct val="100000"/>
-              <a:buChar char="•"/>
+            <a:pPr>
               <a:lnSpc>
                 <a:spcPts val="2200"/>
               </a:lnSpc>
             </a:pPr>
             <a:r>
-              <a:rPr sz="2000" b="0">
+              <a:rPr sz="1200" b="0">
                 <a:solidFill>
                   <a:srgbClr val="333333"/>
                 </a:solidFill>
                 <a:latin typeface="Calibri"/>
               </a:rPr>
-              <a:t>Root at the lower-left</a:t>
-            </a:r>
-          </a:p>
-          <a:p>
-            <a:pPr lvl="0" marL="457200" indent="-228600">
-              <a:buFont typeface="Calibri"/>
-              <a:spcAft>
-                <a:spcPts val="1000"/>
-              </a:spcAft>
-              <a:buSzPct val="100000"/>
-              <a:buChar char="•"/>
-              <a:lnSpc>
-                <a:spcPts val="2200"/>
-              </a:lnSpc>
-            </a:pPr>
-            <a:r>
-              <a:rPr sz="2000" b="0">
-                <a:solidFill>
-                  <a:srgbClr val="333333"/>
-                </a:solidFill>
-                <a:latin typeface="Calibri"/>
-              </a:rPr>
-              <a:t>Walking left children grows the packing rightward</a:t>
-            </a:r>
-          </a:p>
-          <a:p>
-            <a:pPr lvl="0" marL="457200" indent="-228600">
-              <a:buFont typeface="Calibri"/>
-              <a:spcAft>
-                <a:spcPts val="1000"/>
-              </a:spcAft>
-              <a:buSzPct val="100000"/>
-              <a:buChar char="•"/>
-              <a:lnSpc>
-                <a:spcPts val="2200"/>
-              </a:lnSpc>
-            </a:pPr>
-            <a:r>
-              <a:rPr sz="2000" b="0">
-                <a:solidFill>
-                  <a:srgbClr val="333333"/>
-                </a:solidFill>
-                <a:latin typeface="Calibri"/>
-              </a:rPr>
-              <a:t>Packing is typically done with a horizontal contour so y coordinates stay compacted</a:t>
-            </a:r>
-          </a:p>
-          <a:p>
-            <a:pPr lvl="0" marL="457200" indent="-228600">
-              <a:buFont typeface="Calibri"/>
-              <a:spcAft>
-                <a:spcPts val="1000"/>
-              </a:spcAft>
-              <a:buSzPct val="100000"/>
-              <a:buChar char="•"/>
-              <a:lnSpc>
-                <a:spcPts val="2200"/>
-              </a:lnSpc>
-            </a:pPr>
-            <a:r>
-              <a:rPr sz="2000" b="0">
-                <a:solidFill>
-                  <a:srgbClr val="333333"/>
-                </a:solidFill>
-                <a:latin typeface="Calibri"/>
-              </a:rPr>
-              <a:t>Perturbing the tree, rotate, move, swap, yields neighboring packings for annealing later</a:t>
-            </a:r>
-          </a:p>
-        </p:txBody>
-      </p:sp>
-      <p:sp>
-        <p:nvSpPr>
-          <p:cNvPr id="4" name="TextBox 3"/>
+              <a:t>Root A at the origin</a:t>
+            </a:r>
+          </a:p>
+        </p:txBody>
+      </p:sp>
+      <p:sp>
+        <p:nvSpPr>
+          <p:cNvPr id="5" name="TextBox 4"/>
           <p:cNvSpPr txBox="1"/>
           <p:nvPr/>
         </p:nvSpPr>
@@ -4222,21 +4633,45 @@
                 </a:solidFill>
                 <a:latin typeface="Calibri"/>
               </a:rPr>
-              <a:t>Browser lab track</a:t>
-            </a:r>
-          </a:p>
-        </p:txBody>
-      </p:sp>
-      <p:sp>
-        <p:nvSpPr>
-          <p:cNvPr id="3" name="TextBox 2"/>
+              <a:t>Left chain B→C→E</a:t>
+            </a:r>
+          </a:p>
+        </p:txBody>
+      </p:sp>
+      <p:pic>
+        <p:nvPicPr>
+          <p:cNvPr id="3" name="Picture 2" descr="02-left-chain.png"/>
+          <p:cNvPicPr>
+            <a:picLocks noChangeAspect="1"/>
+          </p:cNvPicPr>
+          <p:nvPr/>
+        </p:nvPicPr>
+        <p:blipFill>
+          <a:blip r:embed="rId2"/>
+          <a:stretch>
+            <a:fillRect/>
+          </a:stretch>
+        </p:blipFill>
+        <p:spPr>
+          <a:xfrm>
+            <a:off x="548640" y="1143000"/>
+            <a:ext cx="9424736" cy="4572000"/>
+          </a:xfrm>
+          <a:prstGeom prst="rect">
+            <a:avLst/>
+          </a:prstGeom>
+        </p:spPr>
+      </p:pic>
+      <p:sp>
+        <p:nvSpPr>
+          <p:cNvPr id="4" name="TextBox 3"/>
           <p:cNvSpPr txBox="1"/>
           <p:nvPr/>
         </p:nvSpPr>
         <p:spPr>
           <a:xfrm>
-            <a:off x="548640" y="1234440"/>
-            <a:ext cx="11064240" cy="4937760"/>
+            <a:off x="548640" y="5897880"/>
+            <a:ext cx="11064240" cy="411480"/>
           </a:xfrm>
           <a:prstGeom prst="rect">
             <a:avLst/>
@@ -4249,151 +4684,26 @@
           </a:bodyPr>
           <a:lstStyle/>
           <a:p>
-            <a:pPr lvl="0" marL="457200" indent="-228600">
-              <a:buFont typeface="Calibri"/>
-              <a:spcAft>
-                <a:spcPts val="1000"/>
-              </a:spcAft>
-              <a:buSzPct val="100000"/>
-              <a:buChar char="•"/>
+            <a:pPr>
               <a:lnSpc>
                 <a:spcPts val="2200"/>
               </a:lnSpc>
             </a:pPr>
             <a:r>
-              <a:rPr sz="2000" b="0">
+              <a:rPr sz="1200" b="0">
                 <a:solidFill>
                   <a:srgbClr val="333333"/>
                 </a:solidFill>
                 <a:latin typeface="Calibri"/>
               </a:rPr>
-              <a:t>Open </a:t>
-            </a:r>
-            <a:r>
-              <a:rPr sz="2000" b="1">
-                <a:solidFill>
-                  <a:srgbClr val="333333"/>
-                </a:solidFill>
-                <a:latin typeface="Calibri"/>
-              </a:rPr>
-              <a:t>bstar-tree</a:t>
-            </a:r>
-          </a:p>
-          <a:p>
-            <a:pPr lvl="0" marL="457200" indent="-228600">
-              <a:buFont typeface="Calibri"/>
-              <a:spcAft>
-                <a:spcPts val="1000"/>
-              </a:spcAft>
-              <a:buSzPct val="100000"/>
-              <a:buChar char="•"/>
-              <a:lnSpc>
-                <a:spcPts val="2200"/>
-              </a:lnSpc>
-            </a:pPr>
-            <a:r>
-              <a:rPr sz="2000" b="0">
-                <a:solidFill>
-                  <a:srgbClr val="333333"/>
-                </a:solidFill>
-                <a:latin typeface="Calibri"/>
-              </a:rPr>
-              <a:t>Load a starter tree over A–E</a:t>
-            </a:r>
-          </a:p>
-          <a:p>
-            <a:pPr lvl="0" marL="457200" indent="-228600">
-              <a:buFont typeface="Calibri"/>
-              <a:spcAft>
-                <a:spcPts val="1000"/>
-              </a:spcAft>
-              <a:buSzPct val="100000"/>
-              <a:buChar char="•"/>
-              <a:lnSpc>
-                <a:spcPts val="2200"/>
-              </a:lnSpc>
-            </a:pPr>
-            <a:r>
-              <a:rPr sz="2000" b="0">
-                <a:solidFill>
-                  <a:srgbClr val="333333"/>
-                </a:solidFill>
-                <a:latin typeface="Calibri"/>
-              </a:rPr>
-              <a:t>Step placement: parent, left child, right child</a:t>
-            </a:r>
-          </a:p>
-          <a:p>
-            <a:pPr lvl="0" marL="457200" indent="-228600">
-              <a:buFont typeface="Calibri"/>
-              <a:spcAft>
-                <a:spcPts val="1000"/>
-              </a:spcAft>
-              <a:buSzPct val="100000"/>
-              <a:buChar char="•"/>
-              <a:lnSpc>
-                <a:spcPts val="2200"/>
-              </a:lnSpc>
-            </a:pPr>
-            <a:r>
-              <a:rPr sz="2000" b="0">
-                <a:solidFill>
-                  <a:srgbClr val="333333"/>
-                </a:solidFill>
-                <a:latin typeface="Calibri"/>
-              </a:rPr>
-              <a:t>Watch modules land left/right/above as the contour updates</a:t>
-            </a:r>
-          </a:p>
-          <a:p>
-            <a:pPr lvl="0" marL="457200" indent="-228600">
-              <a:buFont typeface="Calibri"/>
-              <a:spcAft>
-                <a:spcPts val="1000"/>
-              </a:spcAft>
-              <a:buSzPct val="100000"/>
-              <a:buChar char="•"/>
-              <a:lnSpc>
-                <a:spcPts val="2200"/>
-              </a:lnSpc>
-            </a:pPr>
-            <a:r>
-              <a:rPr sz="2000" b="0">
-                <a:solidFill>
-                  <a:srgbClr val="333333"/>
-                </a:solidFill>
-                <a:latin typeface="Calibri"/>
-              </a:rPr>
-              <a:t>Inspect outline legality and deadspace</a:t>
-            </a:r>
-          </a:p>
-          <a:p>
-            <a:pPr lvl="0" marL="457200" indent="-228600">
-              <a:buFont typeface="Calibri"/>
-              <a:spcAft>
-                <a:spcPts val="1000"/>
-              </a:spcAft>
-              <a:buSzPct val="100000"/>
-              <a:buChar char="•"/>
-              <a:lnSpc>
-                <a:spcPts val="2200"/>
-              </a:lnSpc>
-            </a:pPr>
-            <a:r>
-              <a:rPr sz="2000" b="0">
-                <a:solidFill>
-                  <a:srgbClr val="333333"/>
-                </a:solidFill>
-                <a:latin typeface="Calibri"/>
-              </a:rPr>
-              <a:t>Then code the same left/right packing rules</a:t>
-            </a:r>
-          </a:p>
-        </p:txBody>
-      </p:sp>
-      <p:sp>
-        <p:nvSpPr>
-          <p:cNvPr id="4" name="TextBox 3"/>
+              <a:t>Left chain B→C→E</a:t>
+            </a:r>
+          </a:p>
+        </p:txBody>
+      </p:sp>
+      <p:sp>
+        <p:nvSpPr>
+          <p:cNvPr id="5" name="TextBox 4"/>
           <p:cNvSpPr txBox="1"/>
           <p:nvPr/>
         </p:nvSpPr>
@@ -4482,21 +4792,45 @@
                 </a:solidFill>
                 <a:latin typeface="Calibri"/>
               </a:rPr>
-              <a:t>Implement track</a:t>
-            </a:r>
-          </a:p>
-        </p:txBody>
-      </p:sp>
-      <p:sp>
-        <p:nvSpPr>
-          <p:cNvPr id="3" name="TextBox 2"/>
+              <a:t>Right child D above A</a:t>
+            </a:r>
+          </a:p>
+        </p:txBody>
+      </p:sp>
+      <p:pic>
+        <p:nvPicPr>
+          <p:cNvPr id="3" name="Picture 2" descr="03-right-d.png"/>
+          <p:cNvPicPr>
+            <a:picLocks noChangeAspect="1"/>
+          </p:cNvPicPr>
+          <p:nvPr/>
+        </p:nvPicPr>
+        <p:blipFill>
+          <a:blip r:embed="rId2"/>
+          <a:stretch>
+            <a:fillRect/>
+          </a:stretch>
+        </p:blipFill>
+        <p:spPr>
+          <a:xfrm>
+            <a:off x="548640" y="1143000"/>
+            <a:ext cx="9424736" cy="4572000"/>
+          </a:xfrm>
+          <a:prstGeom prst="rect">
+            <a:avLst/>
+          </a:prstGeom>
+        </p:spPr>
+      </p:pic>
+      <p:sp>
+        <p:nvSpPr>
+          <p:cNvPr id="4" name="TextBox 3"/>
           <p:cNvSpPr txBox="1"/>
           <p:nvPr/>
         </p:nvSpPr>
         <p:spPr>
           <a:xfrm>
-            <a:off x="548640" y="1234440"/>
-            <a:ext cx="11064240" cy="4937760"/>
+            <a:off x="548640" y="5897880"/>
+            <a:ext cx="11064240" cy="411480"/>
           </a:xfrm>
           <a:prstGeom prst="rect">
             <a:avLst/>
@@ -4509,120 +4843,26 @@
           </a:bodyPr>
           <a:lstStyle/>
           <a:p>
-            <a:pPr lvl="0" marL="457200" indent="-228600">
-              <a:buFont typeface="Calibri"/>
-              <a:spcAft>
-                <a:spcPts val="1000"/>
-              </a:spcAft>
-              <a:buSzPct val="100000"/>
-              <a:buChar char="•"/>
+            <a:pPr>
               <a:lnSpc>
                 <a:spcPts val="2200"/>
               </a:lnSpc>
             </a:pPr>
             <a:r>
-              <a:rPr sz="2000" b="0">
+              <a:rPr sz="1200" b="0">
                 <a:solidFill>
                   <a:srgbClr val="333333"/>
                 </a:solidFill>
                 <a:latin typeface="Calibri"/>
               </a:rPr>
-              <a:t>Build a B*-tree for the tiny modules</a:t>
-            </a:r>
-          </a:p>
-          <a:p>
-            <a:pPr lvl="0" marL="457200" indent="-228600">
-              <a:buFont typeface="Calibri"/>
-              <a:spcAft>
-                <a:spcPts val="1000"/>
-              </a:spcAft>
-              <a:buSzPct val="100000"/>
-              <a:buChar char="•"/>
-              <a:lnSpc>
-                <a:spcPts val="2200"/>
-              </a:lnSpc>
-            </a:pPr>
-            <a:r>
-              <a:rPr sz="2000" b="0">
-                <a:solidFill>
-                  <a:srgbClr val="333333"/>
-                </a:solidFill>
-                <a:latin typeface="Calibri"/>
-              </a:rPr>
-              <a:t>Implement contour-based packing to emit (x, y, w, h)</a:t>
-            </a:r>
-          </a:p>
-          <a:p>
-            <a:pPr lvl="0" marL="457200" indent="-228600">
-              <a:buFont typeface="Calibri"/>
-              <a:spcAft>
-                <a:spcPts val="1000"/>
-              </a:spcAft>
-              <a:buSzPct val="100000"/>
-              <a:buChar char="•"/>
-              <a:lnSpc>
-                <a:spcPts val="2200"/>
-              </a:lnSpc>
-            </a:pPr>
-            <a:r>
-              <a:rPr sz="2000" b="0">
-                <a:solidFill>
-                  <a:srgbClr val="333333"/>
-                </a:solidFill>
-                <a:latin typeface="Calibri"/>
-              </a:rPr>
-              <a:t>Verify non-overlap and outline containment</a:t>
-            </a:r>
-          </a:p>
-          <a:p>
-            <a:pPr lvl="0" marL="457200" indent="-228600">
-              <a:buFont typeface="Calibri"/>
-              <a:spcAft>
-                <a:spcPts val="1000"/>
-              </a:spcAft>
-              <a:buSzPct val="100000"/>
-              <a:buChar char="•"/>
-              <a:lnSpc>
-                <a:spcPts val="2200"/>
-              </a:lnSpc>
-            </a:pPr>
-            <a:r>
-              <a:rPr sz="2000" b="0">
-                <a:solidFill>
-                  <a:srgbClr val="333333"/>
-                </a:solidFill>
-                <a:latin typeface="Calibri"/>
-              </a:rPr>
-              <a:t>Print the tree in a readable parenthesized form so goldens are reviewable</a:t>
-            </a:r>
-          </a:p>
-          <a:p>
-            <a:pPr lvl="0" marL="457200" indent="-228600">
-              <a:buFont typeface="Calibri"/>
-              <a:spcAft>
-                <a:spcPts val="1000"/>
-              </a:spcAft>
-              <a:buSzPct val="100000"/>
-              <a:buChar char="•"/>
-              <a:lnSpc>
-                <a:spcPts val="2200"/>
-              </a:lnSpc>
-            </a:pPr>
-            <a:r>
-              <a:rPr sz="2000" b="0">
-                <a:solidFill>
-                  <a:srgbClr val="333333"/>
-                </a:solidFill>
-                <a:latin typeface="Calibri"/>
-              </a:rPr>
-              <a:t>Prefer deterministic child ordering for tests</a:t>
-            </a:r>
-          </a:p>
-        </p:txBody>
-      </p:sp>
-      <p:sp>
-        <p:nvSpPr>
-          <p:cNvPr id="4" name="TextBox 3"/>
+              <a:t>Right child D above A</a:t>
+            </a:r>
+          </a:p>
+        </p:txBody>
+      </p:sp>
+      <p:sp>
+        <p:nvSpPr>
+          <p:cNvPr id="5" name="TextBox 4"/>
           <p:cNvSpPr txBox="1"/>
           <p:nvPr/>
         </p:nvSpPr>
@@ -4711,21 +4951,45 @@
                 </a:solidFill>
                 <a:latin typeface="Calibri"/>
               </a:rPr>
-              <a:t>Pitfalls</a:t>
-            </a:r>
-          </a:p>
-        </p:txBody>
-      </p:sp>
-      <p:sp>
-        <p:nvSpPr>
-          <p:cNvPr id="3" name="TextBox 2"/>
+              <a:t>Full B* pack is legal</a:t>
+            </a:r>
+          </a:p>
+        </p:txBody>
+      </p:sp>
+      <p:pic>
+        <p:nvPicPr>
+          <p:cNvPr id="3" name="Picture 2" descr="04-legal.png"/>
+          <p:cNvPicPr>
+            <a:picLocks noChangeAspect="1"/>
+          </p:cNvPicPr>
+          <p:nvPr/>
+        </p:nvPicPr>
+        <p:blipFill>
+          <a:blip r:embed="rId2"/>
+          <a:stretch>
+            <a:fillRect/>
+          </a:stretch>
+        </p:blipFill>
+        <p:spPr>
+          <a:xfrm>
+            <a:off x="548640" y="1143000"/>
+            <a:ext cx="9424736" cy="4572000"/>
+          </a:xfrm>
+          <a:prstGeom prst="rect">
+            <a:avLst/>
+          </a:prstGeom>
+        </p:spPr>
+      </p:pic>
+      <p:sp>
+        <p:nvSpPr>
+          <p:cNvPr id="4" name="TextBox 3"/>
           <p:cNvSpPr txBox="1"/>
           <p:nvPr/>
         </p:nvSpPr>
         <p:spPr>
           <a:xfrm>
-            <a:off x="548640" y="1234440"/>
-            <a:ext cx="11064240" cy="4937760"/>
+            <a:off x="548640" y="5897880"/>
+            <a:ext cx="11064240" cy="411480"/>
           </a:xfrm>
           <a:prstGeom prst="rect">
             <a:avLst/>
@@ -4738,76 +5002,26 @@
           </a:bodyPr>
           <a:lstStyle/>
           <a:p>
-            <a:pPr lvl="0" marL="457200" indent="-228600">
-              <a:buFont typeface="Calibri"/>
-              <a:spcAft>
-                <a:spcPts val="1000"/>
-              </a:spcAft>
-              <a:buSzPct val="100000"/>
-              <a:buChar char="•"/>
+            <a:pPr>
               <a:lnSpc>
                 <a:spcPts val="2200"/>
               </a:lnSpc>
             </a:pPr>
             <a:r>
-              <a:rPr sz="2000" b="0">
+              <a:rPr sz="1200" b="0">
                 <a:solidFill>
                   <a:srgbClr val="333333"/>
                 </a:solidFill>
                 <a:latin typeface="Calibri"/>
               </a:rPr>
-              <a:t>Getting left/right geometry backwards is the number-one bug</a:t>
-            </a:r>
-          </a:p>
-          <a:p>
-            <a:pPr lvl="0" marL="457200" indent="-228600">
-              <a:buFont typeface="Calibri"/>
-              <a:spcAft>
-                <a:spcPts val="1000"/>
-              </a:spcAft>
-              <a:buSzPct val="100000"/>
-              <a:buChar char="•"/>
-              <a:lnSpc>
-                <a:spcPts val="2200"/>
-              </a:lnSpc>
-            </a:pPr>
-            <a:r>
-              <a:rPr sz="2000" b="0">
-                <a:solidFill>
-                  <a:srgbClr val="333333"/>
-                </a:solidFill>
-                <a:latin typeface="Calibri"/>
-              </a:rPr>
-              <a:t>Contour updates that forget deleted segments leave modules floating or overlapping</a:t>
-            </a:r>
-          </a:p>
-          <a:p>
-            <a:pPr lvl="0" marL="457200" indent="-228600">
-              <a:buFont typeface="Calibri"/>
-              <a:spcAft>
-                <a:spcPts val="1000"/>
-              </a:spcAft>
-              <a:buSzPct val="100000"/>
-              <a:buChar char="•"/>
-              <a:lnSpc>
-                <a:spcPts val="2200"/>
-              </a:lnSpc>
-            </a:pPr>
-            <a:r>
-              <a:rPr sz="2000" b="0">
-                <a:solidFill>
-                  <a:srgbClr val="333333"/>
-                </a:solidFill>
-                <a:latin typeface="Calibri"/>
-              </a:rPr>
-              <a:t>Don’t confuse B*-tree adjacency with netlist adjacency</a:t>
-            </a:r>
-          </a:p>
-        </p:txBody>
-      </p:sp>
-      <p:sp>
-        <p:nvSpPr>
-          <p:cNvPr id="4" name="TextBox 3"/>
+              <a:t>Full B* pack is legal</a:t>
+            </a:r>
+          </a:p>
+        </p:txBody>
+      </p:sp>
+      <p:sp>
+        <p:nvSpPr>
+          <p:cNvPr id="5" name="TextBox 4"/>
           <p:cNvSpPr txBox="1"/>
           <p:nvPr/>
         </p:nvSpPr>
@@ -4896,7 +5110,166 @@
                 </a:solidFill>
                 <a:latin typeface="Calibri"/>
               </a:rPr>
-              <a:t>Your turn</a:t>
+              <a:t>B* is compact and mutable</a:t>
+            </a:r>
+          </a:p>
+        </p:txBody>
+      </p:sp>
+      <p:pic>
+        <p:nvPicPr>
+          <p:cNvPr id="3" name="Picture 2" descr="05-takeaway.png"/>
+          <p:cNvPicPr>
+            <a:picLocks noChangeAspect="1"/>
+          </p:cNvPicPr>
+          <p:nvPr/>
+        </p:nvPicPr>
+        <p:blipFill>
+          <a:blip r:embed="rId2"/>
+          <a:stretch>
+            <a:fillRect/>
+          </a:stretch>
+        </p:blipFill>
+        <p:spPr>
+          <a:xfrm>
+            <a:off x="548640" y="1143000"/>
+            <a:ext cx="9424736" cy="4572000"/>
+          </a:xfrm>
+          <a:prstGeom prst="rect">
+            <a:avLst/>
+          </a:prstGeom>
+        </p:spPr>
+      </p:pic>
+      <p:sp>
+        <p:nvSpPr>
+          <p:cNvPr id="4" name="TextBox 3"/>
+          <p:cNvSpPr txBox="1"/>
+          <p:nvPr/>
+        </p:nvSpPr>
+        <p:spPr>
+          <a:xfrm>
+            <a:off x="548640" y="5897880"/>
+            <a:ext cx="11064240" cy="411480"/>
+          </a:xfrm>
+          <a:prstGeom prst="rect">
+            <a:avLst/>
+          </a:prstGeom>
+          <a:noFill/>
+        </p:spPr>
+        <p:txBody>
+          <a:bodyPr wrap="square">
+            <a:noAutofit/>
+          </a:bodyPr>
+          <a:lstStyle/>
+          <a:p>
+            <a:pPr>
+              <a:lnSpc>
+                <a:spcPts val="2200"/>
+              </a:lnSpc>
+            </a:pPr>
+            <a:r>
+              <a:rPr sz="1200" b="0">
+                <a:solidFill>
+                  <a:srgbClr val="333333"/>
+                </a:solidFill>
+                <a:latin typeface="Calibri"/>
+              </a:rPr>
+              <a:t>B* is compact and mutable</a:t>
+            </a:r>
+          </a:p>
+        </p:txBody>
+      </p:sp>
+      <p:sp>
+        <p:nvSpPr>
+          <p:cNvPr id="5" name="TextBox 4"/>
+          <p:cNvSpPr txBox="1"/>
+          <p:nvPr/>
+        </p:nvSpPr>
+        <p:spPr>
+          <a:xfrm>
+            <a:off x="548640" y="6355080"/>
+            <a:ext cx="11064240" cy="320040"/>
+          </a:xfrm>
+          <a:prstGeom prst="rect">
+            <a:avLst/>
+          </a:prstGeom>
+          <a:noFill/>
+        </p:spPr>
+        <p:txBody>
+          <a:bodyPr wrap="square">
+            <a:noAutofit/>
+          </a:bodyPr>
+          <a:lstStyle/>
+          <a:p>
+            <a:pPr algn="r">
+              <a:lnSpc>
+                <a:spcPts val="2200"/>
+              </a:lnSpc>
+              <a:defRPr sz="1000" b="0">
+                <a:solidFill>
+                  <a:srgbClr val="666666"/>
+                </a:solidFill>
+                <a:latin typeface="Calibri"/>
+              </a:defRPr>
+            </a:pPr>
+            <a:r>
+              <a:t>learn_floorplanning — 03 bstar tree</a:t>
+            </a:r>
+          </a:p>
+        </p:txBody>
+      </p:sp>
+    </p:spTree>
+  </p:cSld>
+  <p:clrMapOvr>
+    <a:masterClrMapping/>
+  </p:clrMapOvr>
+</p:sld>
+</file>
+
+<file path=ppt/slides/slide7.xml><?xml version="1.0" encoding="utf-8"?>
+<p:sld xmlns:a="http://schemas.openxmlformats.org/drawingml/2006/main" xmlns:p="http://schemas.openxmlformats.org/presentationml/2006/main" xmlns:r="http://schemas.openxmlformats.org/officeDocument/2006/relationships">
+  <p:cSld>
+    <p:spTree>
+      <p:nvGrpSpPr>
+        <p:cNvPr id="1" name=""/>
+        <p:cNvGrpSpPr/>
+        <p:nvPr/>
+      </p:nvGrpSpPr>
+      <p:grpSpPr/>
+      <p:sp>
+        <p:nvSpPr>
+          <p:cNvPr id="2" name="TextBox 1"/>
+          <p:cNvSpPr txBox="1"/>
+          <p:nvPr/>
+        </p:nvSpPr>
+        <p:spPr>
+          <a:xfrm>
+            <a:off x="548640" y="411480"/>
+            <a:ext cx="11064240" cy="777240"/>
+          </a:xfrm>
+          <a:prstGeom prst="rect">
+            <a:avLst/>
+          </a:prstGeom>
+          <a:noFill/>
+        </p:spPr>
+        <p:txBody>
+          <a:bodyPr wrap="square">
+            <a:noAutofit/>
+          </a:bodyPr>
+          <a:lstStyle/>
+          <a:p>
+            <a:pPr>
+              <a:lnSpc>
+                <a:spcPts val="2200"/>
+              </a:lnSpc>
+            </a:pPr>
+            <a:r>
+              <a:rPr sz="2800" b="1">
+                <a:solidFill>
+                  <a:srgbClr val="1A1A2E"/>
+                </a:solidFill>
+                <a:latin typeface="Calibri"/>
+              </a:rPr>
+              <a:t>Browser lab track</a:t>
             </a:r>
           </a:p>
         </p:txBody>
@@ -4941,7 +5314,7 @@
                 </a:solidFill>
                 <a:latin typeface="Calibri"/>
               </a:rPr>
-              <a:t>Produce a legal B*-tree packing inside the outline</a:t>
+              <a:t>Open bstar-tree and Pack B*-tree</a:t>
             </a:r>
           </a:p>
           <a:p>
@@ -4963,7 +5336,311 @@
                 </a:solidFill>
                 <a:latin typeface="Calibri"/>
               </a:rPr>
-              <a:t>Next: sequence pairs, another classic encoding with positive and negative sequences</a:t>
+              <a:t>Confirm A at zero comma zero, B at x equals three, D above A</a:t>
+            </a:r>
+          </a:p>
+        </p:txBody>
+      </p:sp>
+      <p:sp>
+        <p:nvSpPr>
+          <p:cNvPr id="4" name="TextBox 3"/>
+          <p:cNvSpPr txBox="1"/>
+          <p:nvPr/>
+        </p:nvSpPr>
+        <p:spPr>
+          <a:xfrm>
+            <a:off x="548640" y="6355080"/>
+            <a:ext cx="11064240" cy="320040"/>
+          </a:xfrm>
+          <a:prstGeom prst="rect">
+            <a:avLst/>
+          </a:prstGeom>
+          <a:noFill/>
+        </p:spPr>
+        <p:txBody>
+          <a:bodyPr wrap="square">
+            <a:noAutofit/>
+          </a:bodyPr>
+          <a:lstStyle/>
+          <a:p>
+            <a:pPr algn="r">
+              <a:lnSpc>
+                <a:spcPts val="2200"/>
+              </a:lnSpc>
+              <a:defRPr sz="1000" b="0">
+                <a:solidFill>
+                  <a:srgbClr val="666666"/>
+                </a:solidFill>
+                <a:latin typeface="Calibri"/>
+              </a:defRPr>
+            </a:pPr>
+            <a:r>
+              <a:t>learn_floorplanning — 03 bstar tree</a:t>
+            </a:r>
+          </a:p>
+        </p:txBody>
+      </p:sp>
+    </p:spTree>
+  </p:cSld>
+  <p:clrMapOvr>
+    <a:masterClrMapping/>
+  </p:clrMapOvr>
+</p:sld>
+</file>
+
+<file path=ppt/slides/slide8.xml><?xml version="1.0" encoding="utf-8"?>
+<p:sld xmlns:a="http://schemas.openxmlformats.org/drawingml/2006/main" xmlns:p="http://schemas.openxmlformats.org/presentationml/2006/main" xmlns:r="http://schemas.openxmlformats.org/officeDocument/2006/relationships">
+  <p:cSld>
+    <p:spTree>
+      <p:nvGrpSpPr>
+        <p:cNvPr id="1" name=""/>
+        <p:cNvGrpSpPr/>
+        <p:nvPr/>
+      </p:nvGrpSpPr>
+      <p:grpSpPr/>
+      <p:sp>
+        <p:nvSpPr>
+          <p:cNvPr id="2" name="TextBox 1"/>
+          <p:cNvSpPr txBox="1"/>
+          <p:nvPr/>
+        </p:nvSpPr>
+        <p:spPr>
+          <a:xfrm>
+            <a:off x="548640" y="411480"/>
+            <a:ext cx="11064240" cy="777240"/>
+          </a:xfrm>
+          <a:prstGeom prst="rect">
+            <a:avLst/>
+          </a:prstGeom>
+          <a:noFill/>
+        </p:spPr>
+        <p:txBody>
+          <a:bodyPr wrap="square">
+            <a:noAutofit/>
+          </a:bodyPr>
+          <a:lstStyle/>
+          <a:p>
+            <a:pPr>
+              <a:lnSpc>
+                <a:spcPts val="2200"/>
+              </a:lnSpc>
+            </a:pPr>
+            <a:r>
+              <a:rPr sz="2800" b="1">
+                <a:solidFill>
+                  <a:srgbClr val="1A1A2E"/>
+                </a:solidFill>
+                <a:latin typeface="Calibri"/>
+              </a:rPr>
+              <a:t>Implement track</a:t>
+            </a:r>
+          </a:p>
+        </p:txBody>
+      </p:sp>
+      <p:sp>
+        <p:nvSpPr>
+          <p:cNvPr id="3" name="TextBox 2"/>
+          <p:cNvSpPr txBox="1"/>
+          <p:nvPr/>
+        </p:nvSpPr>
+        <p:spPr>
+          <a:xfrm>
+            <a:off x="548640" y="1234440"/>
+            <a:ext cx="11064240" cy="4937760"/>
+          </a:xfrm>
+          <a:prstGeom prst="rect">
+            <a:avLst/>
+          </a:prstGeom>
+          <a:noFill/>
+        </p:spPr>
+        <p:txBody>
+          <a:bodyPr wrap="square">
+            <a:noAutofit/>
+          </a:bodyPr>
+          <a:lstStyle/>
+          <a:p>
+            <a:pPr lvl="0" marL="457200" indent="-228600">
+              <a:buFont typeface="Calibri"/>
+              <a:spcAft>
+                <a:spcPts val="1000"/>
+              </a:spcAft>
+              <a:buSzPct val="100000"/>
+              <a:buChar char="•"/>
+              <a:lnSpc>
+                <a:spcPts val="2200"/>
+              </a:lnSpc>
+            </a:pPr>
+            <a:r>
+              <a:rPr sz="2000" b="0">
+                <a:solidFill>
+                  <a:srgbClr val="333333"/>
+                </a:solidFill>
+                <a:latin typeface="Calibri"/>
+              </a:rPr>
+              <a:t>Build the golden tree and contour-pack it</a:t>
+            </a:r>
+          </a:p>
+          <a:p>
+            <a:pPr lvl="0" marL="457200" indent="-228600">
+              <a:buFont typeface="Calibri"/>
+              <a:spcAft>
+                <a:spcPts val="1000"/>
+              </a:spcAft>
+              <a:buSzPct val="100000"/>
+              <a:buChar char="•"/>
+              <a:lnSpc>
+                <a:spcPts val="2200"/>
+              </a:lnSpc>
+            </a:pPr>
+            <a:r>
+              <a:rPr sz="2000" b="0">
+                <a:solidFill>
+                  <a:srgbClr val="333333"/>
+                </a:solidFill>
+                <a:latin typeface="Calibri"/>
+              </a:rPr>
+              <a:t>Assert A at (0,0), B.x equals A.x plus A.w, D.y at least A.h, and legality true</a:t>
+            </a:r>
+          </a:p>
+        </p:txBody>
+      </p:sp>
+      <p:sp>
+        <p:nvSpPr>
+          <p:cNvPr id="4" name="TextBox 3"/>
+          <p:cNvSpPr txBox="1"/>
+          <p:nvPr/>
+        </p:nvSpPr>
+        <p:spPr>
+          <a:xfrm>
+            <a:off x="548640" y="6355080"/>
+            <a:ext cx="11064240" cy="320040"/>
+          </a:xfrm>
+          <a:prstGeom prst="rect">
+            <a:avLst/>
+          </a:prstGeom>
+          <a:noFill/>
+        </p:spPr>
+        <p:txBody>
+          <a:bodyPr wrap="square">
+            <a:noAutofit/>
+          </a:bodyPr>
+          <a:lstStyle/>
+          <a:p>
+            <a:pPr algn="r">
+              <a:lnSpc>
+                <a:spcPts val="2200"/>
+              </a:lnSpc>
+              <a:defRPr sz="1000" b="0">
+                <a:solidFill>
+                  <a:srgbClr val="666666"/>
+                </a:solidFill>
+                <a:latin typeface="Calibri"/>
+              </a:defRPr>
+            </a:pPr>
+            <a:r>
+              <a:t>learn_floorplanning — 03 bstar tree</a:t>
+            </a:r>
+          </a:p>
+        </p:txBody>
+      </p:sp>
+    </p:spTree>
+  </p:cSld>
+  <p:clrMapOvr>
+    <a:masterClrMapping/>
+  </p:clrMapOvr>
+</p:sld>
+</file>
+
+<file path=ppt/slides/slide9.xml><?xml version="1.0" encoding="utf-8"?>
+<p:sld xmlns:a="http://schemas.openxmlformats.org/drawingml/2006/main" xmlns:p="http://schemas.openxmlformats.org/presentationml/2006/main" xmlns:r="http://schemas.openxmlformats.org/officeDocument/2006/relationships">
+  <p:cSld>
+    <p:spTree>
+      <p:nvGrpSpPr>
+        <p:cNvPr id="1" name=""/>
+        <p:cNvGrpSpPr/>
+        <p:nvPr/>
+      </p:nvGrpSpPr>
+      <p:grpSpPr/>
+      <p:sp>
+        <p:nvSpPr>
+          <p:cNvPr id="2" name="TextBox 1"/>
+          <p:cNvSpPr txBox="1"/>
+          <p:nvPr/>
+        </p:nvSpPr>
+        <p:spPr>
+          <a:xfrm>
+            <a:off x="548640" y="411480"/>
+            <a:ext cx="11064240" cy="777240"/>
+          </a:xfrm>
+          <a:prstGeom prst="rect">
+            <a:avLst/>
+          </a:prstGeom>
+          <a:noFill/>
+        </p:spPr>
+        <p:txBody>
+          <a:bodyPr wrap="square">
+            <a:noAutofit/>
+          </a:bodyPr>
+          <a:lstStyle/>
+          <a:p>
+            <a:pPr>
+              <a:lnSpc>
+                <a:spcPts val="2200"/>
+              </a:lnSpc>
+            </a:pPr>
+            <a:r>
+              <a:rPr sz="2800" b="1">
+                <a:solidFill>
+                  <a:srgbClr val="1A1A2E"/>
+                </a:solidFill>
+                <a:latin typeface="Calibri"/>
+              </a:rPr>
+              <a:t>Pitfalls</a:t>
+            </a:r>
+          </a:p>
+        </p:txBody>
+      </p:sp>
+      <p:sp>
+        <p:nvSpPr>
+          <p:cNvPr id="3" name="TextBox 2"/>
+          <p:cNvSpPr txBox="1"/>
+          <p:nvPr/>
+        </p:nvSpPr>
+        <p:spPr>
+          <a:xfrm>
+            <a:off x="548640" y="1234440"/>
+            <a:ext cx="11064240" cy="4937760"/>
+          </a:xfrm>
+          <a:prstGeom prst="rect">
+            <a:avLst/>
+          </a:prstGeom>
+          <a:noFill/>
+        </p:spPr>
+        <p:txBody>
+          <a:bodyPr wrap="square">
+            <a:noAutofit/>
+          </a:bodyPr>
+          <a:lstStyle/>
+          <a:p>
+            <a:pPr lvl="0" marL="457200" indent="-228600">
+              <a:buFont typeface="Calibri"/>
+              <a:spcAft>
+                <a:spcPts val="1000"/>
+              </a:spcAft>
+              <a:buSzPct val="100000"/>
+              <a:buChar char="•"/>
+              <a:lnSpc>
+                <a:spcPts val="2200"/>
+              </a:lnSpc>
+            </a:pPr>
+            <a:r>
+              <a:rPr sz="2000" b="0">
+                <a:solidFill>
+                  <a:srgbClr val="333333"/>
+                </a:solidFill>
+                <a:latin typeface="Calibri"/>
+              </a:rPr>
+              <a:t>Reversing left/right geometry; stale contour segments; treating the tree as a netlist</a:t>
             </a:r>
           </a:p>
         </p:txBody>

--- a/courses/learn_floorplanning/module02-03-bstar-tree/slides.pptx
+++ b/courses/learn_floorplanning/module02-03-bstar-tree/slides.pptx
@@ -15,6 +15,9 @@
     <p:sldId id="263" r:id="rId15"/>
     <p:sldId id="264" r:id="rId16"/>
     <p:sldId id="265" r:id="rId17"/>
+    <p:sldId id="266" r:id="rId18"/>
+    <p:sldId id="267" r:id="rId19"/>
+    <p:sldId id="268" r:id="rId20"/>
   </p:sldIdLst>
   <p:sldSz cx="12191695" cy="6858000" type="screen4x3"/>
   <p:notesSz cx="6858000" cy="9144000"/>
@@ -514,12 +517,6 @@
               <a:t>B-star stores packing adjacency: left child sits right-of the parent; right child sits above on a contour. Root A at the origin; left chain B then C then E; right child D above A.</a:t>
             </a:r>
           </a:p>
-          <a:p/>
-          <a:p>
-            <a:r>
-              <a:t>&lt;!-- algorithm-walkthrough --&gt;</a:t>
-            </a:r>
-          </a:p>
         </p:txBody>
       </p:sp>
       <p:sp>
@@ -587,6 +584,146 @@
           <a:lstStyle/>
           <a:p>
             <a:r>
+              <a:t>Build the golden tree and contour-pack it. Assert A at (0,0), B.x equals A.x plus A.w, D.y at least A.h, and legality true.</a:t>
+            </a:r>
+          </a:p>
+        </p:txBody>
+      </p:sp>
+      <p:sp>
+        <p:nvSpPr>
+          <p:cNvPr id="4" name="Slide Number Placeholder 3"/>
+          <p:cNvSpPr>
+            <a:spLocks noGrp="1"/>
+          </p:cNvSpPr>
+          <p:nvPr>
+            <p:ph type="sldNum" idx="5" sz="quarter"/>
+          </p:nvPr>
+        </p:nvSpPr>
+        <p:spPr/>
+      </p:sp>
+    </p:spTree>
+  </p:cSld>
+  <p:clrMapOvr>
+    <a:masterClrMapping/>
+  </p:clrMapOvr>
+</p:notes>
+</file>
+
+<file path=ppt/notesSlides/notesSlide11.xml><?xml version="1.0" encoding="utf-8"?>
+<p:notes xmlns:a="http://schemas.openxmlformats.org/drawingml/2006/main" xmlns:p="http://schemas.openxmlformats.org/presentationml/2006/main" xmlns:r="http://schemas.openxmlformats.org/officeDocument/2006/relationships">
+  <p:cSld>
+    <p:spTree>
+      <p:nvGrpSpPr>
+        <p:cNvPr id="1" name=""/>
+        <p:cNvGrpSpPr/>
+        <p:nvPr/>
+      </p:nvGrpSpPr>
+      <p:grpSpPr>
+        <a:xfrm>
+          <a:off x="0" y="0"/>
+          <a:ext cx="0" cy="0"/>
+          <a:chOff x="0" y="0"/>
+          <a:chExt cx="0" cy="0"/>
+        </a:xfrm>
+      </p:grpSpPr>
+      <p:sp>
+        <p:nvSpPr>
+          <p:cNvPr id="2" name="Slide Image Placeholder 1"/>
+          <p:cNvSpPr>
+            <a:spLocks noGrp="1"/>
+          </p:cNvSpPr>
+          <p:nvPr>
+            <p:ph type="sldImg" idx="2"/>
+          </p:nvPr>
+        </p:nvSpPr>
+        <p:spPr/>
+      </p:sp>
+      <p:sp>
+        <p:nvSpPr>
+          <p:cNvPr id="3" name="Notes Placeholder 2"/>
+          <p:cNvSpPr>
+            <a:spLocks noGrp="1"/>
+          </p:cNvSpPr>
+          <p:nvPr>
+            <p:ph type="body" idx="3" sz="quarter"/>
+          </p:nvPr>
+        </p:nvSpPr>
+        <p:spPr/>
+        <p:txBody>
+          <a:bodyPr/>
+          <a:lstStyle/>
+          <a:p>
+            <a:r>
+              <a:t>Reversing left/right geometry; stale contour segments; treating the tree as a netlist.</a:t>
+            </a:r>
+          </a:p>
+        </p:txBody>
+      </p:sp>
+      <p:sp>
+        <p:nvSpPr>
+          <p:cNvPr id="4" name="Slide Number Placeholder 3"/>
+          <p:cNvSpPr>
+            <a:spLocks noGrp="1"/>
+          </p:cNvSpPr>
+          <p:nvPr>
+            <p:ph type="sldNum" idx="5" sz="quarter"/>
+          </p:nvPr>
+        </p:nvSpPr>
+        <p:spPr/>
+      </p:sp>
+    </p:spTree>
+  </p:cSld>
+  <p:clrMapOvr>
+    <a:masterClrMapping/>
+  </p:clrMapOvr>
+</p:notes>
+</file>
+
+<file path=ppt/notesSlides/notesSlide12.xml><?xml version="1.0" encoding="utf-8"?>
+<p:notes xmlns:a="http://schemas.openxmlformats.org/drawingml/2006/main" xmlns:p="http://schemas.openxmlformats.org/presentationml/2006/main" xmlns:r="http://schemas.openxmlformats.org/officeDocument/2006/relationships">
+  <p:cSld>
+    <p:spTree>
+      <p:nvGrpSpPr>
+        <p:cNvPr id="1" name=""/>
+        <p:cNvGrpSpPr/>
+        <p:nvPr/>
+      </p:nvGrpSpPr>
+      <p:grpSpPr>
+        <a:xfrm>
+          <a:off x="0" y="0"/>
+          <a:ext cx="0" cy="0"/>
+          <a:chOff x="0" y="0"/>
+          <a:chExt cx="0" cy="0"/>
+        </a:xfrm>
+      </p:grpSpPr>
+      <p:sp>
+        <p:nvSpPr>
+          <p:cNvPr id="2" name="Slide Image Placeholder 1"/>
+          <p:cNvSpPr>
+            <a:spLocks noGrp="1"/>
+          </p:cNvSpPr>
+          <p:nvPr>
+            <p:ph type="sldImg" idx="2"/>
+          </p:nvPr>
+        </p:nvSpPr>
+        <p:spPr/>
+      </p:sp>
+      <p:sp>
+        <p:nvSpPr>
+          <p:cNvPr id="3" name="Notes Placeholder 2"/>
+          <p:cNvSpPr>
+            <a:spLocks noGrp="1"/>
+          </p:cNvSpPr>
+          <p:nvPr>
+            <p:ph type="body" idx="3" sz="quarter"/>
+          </p:nvPr>
+        </p:nvSpPr>
+        <p:spPr/>
+        <p:txBody>
+          <a:bodyPr/>
+          <a:lstStyle/>
+          <a:p>
+            <a:r>
               <a:t>Produce the legal B-star packing. Next: sequence-pair permutations as another encoding.</a:t>
             </a:r>
           </a:p>
@@ -657,7 +794,13 @@
           <a:lstStyle/>
           <a:p>
             <a:r>
-              <a:t>B-star packing places the root at the lower left. A lands at zero comma zero with size three by two. Left children go right-of; right children go above via the contour.</a:t>
+              <a:t>B-star packing walks the tree with a contour. Left child sits to the right of the parent; right child sits above using the contour height.</a:t>
+            </a:r>
+          </a:p>
+          <a:p/>
+          <a:p>
+            <a:r>
+              <a:t>Open this module's examples file and find the Pseudocode section. That written sketch is what you implement on the implement track and what the browser challenges measure.</a:t>
             </a:r>
           </a:p>
         </p:txBody>
@@ -727,7 +870,7 @@
           <a:lstStyle/>
           <a:p>
             <a:r>
-              <a:t>The left spine walks rightward: B at x equals three, then C, then E. Contour heights track the skyline so later modules sit tightly.</a:t>
+              <a:t>Golden tree roots A at the origin. B’s x equals A’s right edge; D’s y is at least A’s height. The packing must stay legal in the outline.</a:t>
             </a:r>
           </a:p>
         </p:txBody>
@@ -797,7 +940,7 @@
           <a:lstStyle/>
           <a:p>
             <a:r>
-              <a:t>D is the right child of A, so it packs above A on the contour. Its y is at least two—A's height—keeping the tree geometry honest.</a:t>
+              <a:t>B-star packing places the root at the lower left. A lands at zero comma zero with size three by two. Left children go right-of; right children go above via the contour.</a:t>
             </a:r>
           </a:p>
         </p:txBody>
@@ -867,7 +1010,7 @@
           <a:lstStyle/>
           <a:p>
             <a:r>
-              <a:t>All five modules are placed. The packing is legal inside ten by eight. Perturbing the tree—swap, rotate, move—will feed simulated annealing later.</a:t>
+              <a:t>The left spine walks rightward: B at x equals three, then C, then E. Contour heights track the skyline so later modules sit tightly.</a:t>
             </a:r>
           </a:p>
         </p:txBody>
@@ -937,13 +1080,7 @@
           <a:lstStyle/>
           <a:p>
             <a:r>
-              <a:t>B-star stores adjacency for packing, not connectivity. Get left and right semantics right, keep the contour correct, and you have a fast neighbor generator for search.</a:t>
-            </a:r>
-          </a:p>
-          <a:p/>
-          <a:p>
-            <a:r>
-              <a:t>&lt;!-- /algorithm-walkthrough --&gt;</a:t>
+              <a:t>D is the right child of A, so it packs above A on the contour. Its y is at least two—A's height—keeping the tree geometry honest.</a:t>
             </a:r>
           </a:p>
         </p:txBody>
@@ -1013,7 +1150,7 @@
           <a:lstStyle/>
           <a:p>
             <a:r>
-              <a:t>Open bstar-tree and Pack B*-tree. Confirm A at zero comma zero, B at x equals three, D above A, and a legal five-module packing.</a:t>
+              <a:t>All five modules are placed. The packing is legal inside ten by eight. Perturbing the tree—swap, rotate, move—will feed simulated annealing later.</a:t>
             </a:r>
           </a:p>
         </p:txBody>
@@ -1083,7 +1220,7 @@
           <a:lstStyle/>
           <a:p>
             <a:r>
-              <a:t>Build the golden tree and contour-pack it. Assert A at (0,0), B.x equals A.x plus A.w, D.y at least A.h, and legality true.</a:t>
+              <a:t>B-star stores adjacency for packing, not connectivity. Get left and right semantics right, keep the contour correct, and you have a fast neighbor generator for search.</a:t>
             </a:r>
           </a:p>
         </p:txBody>
@@ -1153,7 +1290,7 @@
           <a:lstStyle/>
           <a:p>
             <a:r>
-              <a:t>Reversing left/right geometry; stale contour segments; treating the tree as a netlist.</a:t>
+              <a:t>Open bstar-tree and Pack B*-tree. Confirm A at zero comma zero, B at x equals three, D above A, and a legal five-module packing.</a:t>
             </a:r>
           </a:p>
         </p:txBody>
@@ -4311,7 +4448,7 @@
                 </a:solidFill>
                 <a:latin typeface="Calibri"/>
               </a:rPr>
-              <a:t>Your turn</a:t>
+              <a:t>Browser lab track</a:t>
             </a:r>
           </a:p>
         </p:txBody>
@@ -4356,7 +4493,7 @@
                 </a:solidFill>
                 <a:latin typeface="Calibri"/>
               </a:rPr>
-              <a:t>Produce the legal B-star packing</a:t>
+              <a:t>Open bstar-tree and Pack B*-tree</a:t>
             </a:r>
           </a:p>
           <a:p>
@@ -4378,7 +4515,7 @@
                 </a:solidFill>
                 <a:latin typeface="Calibri"/>
               </a:rPr>
-              <a:t>Next: sequence-pair permutations as another encoding</a:t>
+              <a:t>Confirm A at zero comma zero, B at x equals three, D above A</a:t>
             </a:r>
           </a:p>
         </p:txBody>
@@ -4430,7 +4567,1120 @@
 </p:sld>
 </file>
 
+<file path=ppt/slides/slide11.xml><?xml version="1.0" encoding="utf-8"?>
+<p:sld xmlns:a="http://schemas.openxmlformats.org/drawingml/2006/main" xmlns:p="http://schemas.openxmlformats.org/presentationml/2006/main" xmlns:r="http://schemas.openxmlformats.org/officeDocument/2006/relationships">
+  <p:cSld>
+    <p:spTree>
+      <p:nvGrpSpPr>
+        <p:cNvPr id="1" name=""/>
+        <p:cNvGrpSpPr/>
+        <p:nvPr/>
+      </p:nvGrpSpPr>
+      <p:grpSpPr/>
+      <p:sp>
+        <p:nvSpPr>
+          <p:cNvPr id="2" name="TextBox 1"/>
+          <p:cNvSpPr txBox="1"/>
+          <p:nvPr/>
+        </p:nvSpPr>
+        <p:spPr>
+          <a:xfrm>
+            <a:off x="548640" y="411480"/>
+            <a:ext cx="11064240" cy="777240"/>
+          </a:xfrm>
+          <a:prstGeom prst="rect">
+            <a:avLst/>
+          </a:prstGeom>
+          <a:noFill/>
+        </p:spPr>
+        <p:txBody>
+          <a:bodyPr wrap="square">
+            <a:noAutofit/>
+          </a:bodyPr>
+          <a:lstStyle/>
+          <a:p>
+            <a:pPr>
+              <a:lnSpc>
+                <a:spcPts val="2200"/>
+              </a:lnSpc>
+            </a:pPr>
+            <a:r>
+              <a:rPr sz="2800" b="1">
+                <a:solidFill>
+                  <a:srgbClr val="1A1A2E"/>
+                </a:solidFill>
+                <a:latin typeface="Calibri"/>
+              </a:rPr>
+              <a:t>Implement track</a:t>
+            </a:r>
+          </a:p>
+        </p:txBody>
+      </p:sp>
+      <p:sp>
+        <p:nvSpPr>
+          <p:cNvPr id="3" name="TextBox 2"/>
+          <p:cNvSpPr txBox="1"/>
+          <p:nvPr/>
+        </p:nvSpPr>
+        <p:spPr>
+          <a:xfrm>
+            <a:off x="548640" y="1234440"/>
+            <a:ext cx="11064240" cy="4937760"/>
+          </a:xfrm>
+          <a:prstGeom prst="rect">
+            <a:avLst/>
+          </a:prstGeom>
+          <a:noFill/>
+        </p:spPr>
+        <p:txBody>
+          <a:bodyPr wrap="square">
+            <a:noAutofit/>
+          </a:bodyPr>
+          <a:lstStyle/>
+          <a:p>
+            <a:pPr lvl="0" marL="457200" indent="-228600">
+              <a:buFont typeface="Calibri"/>
+              <a:spcAft>
+                <a:spcPts val="1000"/>
+              </a:spcAft>
+              <a:buSzPct val="100000"/>
+              <a:buChar char="•"/>
+              <a:lnSpc>
+                <a:spcPts val="2200"/>
+              </a:lnSpc>
+            </a:pPr>
+            <a:r>
+              <a:rPr sz="2000" b="0">
+                <a:solidFill>
+                  <a:srgbClr val="333333"/>
+                </a:solidFill>
+                <a:latin typeface="Calibri"/>
+              </a:rPr>
+              <a:t>Build the golden tree and contour-pack it</a:t>
+            </a:r>
+          </a:p>
+          <a:p>
+            <a:pPr lvl="0" marL="457200" indent="-228600">
+              <a:buFont typeface="Calibri"/>
+              <a:spcAft>
+                <a:spcPts val="1000"/>
+              </a:spcAft>
+              <a:buSzPct val="100000"/>
+              <a:buChar char="•"/>
+              <a:lnSpc>
+                <a:spcPts val="2200"/>
+              </a:lnSpc>
+            </a:pPr>
+            <a:r>
+              <a:rPr sz="2000" b="0">
+                <a:solidFill>
+                  <a:srgbClr val="333333"/>
+                </a:solidFill>
+                <a:latin typeface="Calibri"/>
+              </a:rPr>
+              <a:t>Assert A at (0,0), B.x equals A.x plus A.w, D.y at least A.h, and legality true</a:t>
+            </a:r>
+          </a:p>
+        </p:txBody>
+      </p:sp>
+      <p:sp>
+        <p:nvSpPr>
+          <p:cNvPr id="4" name="TextBox 3"/>
+          <p:cNvSpPr txBox="1"/>
+          <p:nvPr/>
+        </p:nvSpPr>
+        <p:spPr>
+          <a:xfrm>
+            <a:off x="548640" y="6355080"/>
+            <a:ext cx="11064240" cy="320040"/>
+          </a:xfrm>
+          <a:prstGeom prst="rect">
+            <a:avLst/>
+          </a:prstGeom>
+          <a:noFill/>
+        </p:spPr>
+        <p:txBody>
+          <a:bodyPr wrap="square">
+            <a:noAutofit/>
+          </a:bodyPr>
+          <a:lstStyle/>
+          <a:p>
+            <a:pPr algn="r">
+              <a:lnSpc>
+                <a:spcPts val="2200"/>
+              </a:lnSpc>
+              <a:defRPr sz="1000" b="0">
+                <a:solidFill>
+                  <a:srgbClr val="666666"/>
+                </a:solidFill>
+                <a:latin typeface="Calibri"/>
+              </a:defRPr>
+            </a:pPr>
+            <a:r>
+              <a:t>learn_floorplanning — 03 bstar tree</a:t>
+            </a:r>
+          </a:p>
+        </p:txBody>
+      </p:sp>
+    </p:spTree>
+  </p:cSld>
+  <p:clrMapOvr>
+    <a:masterClrMapping/>
+  </p:clrMapOvr>
+</p:sld>
+</file>
+
+<file path=ppt/slides/slide12.xml><?xml version="1.0" encoding="utf-8"?>
+<p:sld xmlns:a="http://schemas.openxmlformats.org/drawingml/2006/main" xmlns:p="http://schemas.openxmlformats.org/presentationml/2006/main" xmlns:r="http://schemas.openxmlformats.org/officeDocument/2006/relationships">
+  <p:cSld>
+    <p:spTree>
+      <p:nvGrpSpPr>
+        <p:cNvPr id="1" name=""/>
+        <p:cNvGrpSpPr/>
+        <p:nvPr/>
+      </p:nvGrpSpPr>
+      <p:grpSpPr/>
+      <p:sp>
+        <p:nvSpPr>
+          <p:cNvPr id="2" name="TextBox 1"/>
+          <p:cNvSpPr txBox="1"/>
+          <p:nvPr/>
+        </p:nvSpPr>
+        <p:spPr>
+          <a:xfrm>
+            <a:off x="548640" y="411480"/>
+            <a:ext cx="11064240" cy="777240"/>
+          </a:xfrm>
+          <a:prstGeom prst="rect">
+            <a:avLst/>
+          </a:prstGeom>
+          <a:noFill/>
+        </p:spPr>
+        <p:txBody>
+          <a:bodyPr wrap="square">
+            <a:noAutofit/>
+          </a:bodyPr>
+          <a:lstStyle/>
+          <a:p>
+            <a:pPr>
+              <a:lnSpc>
+                <a:spcPts val="2200"/>
+              </a:lnSpc>
+            </a:pPr>
+            <a:r>
+              <a:rPr sz="2800" b="1">
+                <a:solidFill>
+                  <a:srgbClr val="1A1A2E"/>
+                </a:solidFill>
+                <a:latin typeface="Calibri"/>
+              </a:rPr>
+              <a:t>Pitfalls</a:t>
+            </a:r>
+          </a:p>
+        </p:txBody>
+      </p:sp>
+      <p:sp>
+        <p:nvSpPr>
+          <p:cNvPr id="3" name="TextBox 2"/>
+          <p:cNvSpPr txBox="1"/>
+          <p:nvPr/>
+        </p:nvSpPr>
+        <p:spPr>
+          <a:xfrm>
+            <a:off x="548640" y="1234440"/>
+            <a:ext cx="11064240" cy="4937760"/>
+          </a:xfrm>
+          <a:prstGeom prst="rect">
+            <a:avLst/>
+          </a:prstGeom>
+          <a:noFill/>
+        </p:spPr>
+        <p:txBody>
+          <a:bodyPr wrap="square">
+            <a:noAutofit/>
+          </a:bodyPr>
+          <a:lstStyle/>
+          <a:p>
+            <a:pPr lvl="0" marL="457200" indent="-228600">
+              <a:buFont typeface="Calibri"/>
+              <a:spcAft>
+                <a:spcPts val="1000"/>
+              </a:spcAft>
+              <a:buSzPct val="100000"/>
+              <a:buChar char="•"/>
+              <a:lnSpc>
+                <a:spcPts val="2200"/>
+              </a:lnSpc>
+            </a:pPr>
+            <a:r>
+              <a:rPr sz="2000" b="0">
+                <a:solidFill>
+                  <a:srgbClr val="333333"/>
+                </a:solidFill>
+                <a:latin typeface="Calibri"/>
+              </a:rPr>
+              <a:t>Reversing left/right geometry; stale contour segments; treating the tree as a netlist</a:t>
+            </a:r>
+          </a:p>
+        </p:txBody>
+      </p:sp>
+      <p:sp>
+        <p:nvSpPr>
+          <p:cNvPr id="4" name="TextBox 3"/>
+          <p:cNvSpPr txBox="1"/>
+          <p:nvPr/>
+        </p:nvSpPr>
+        <p:spPr>
+          <a:xfrm>
+            <a:off x="548640" y="6355080"/>
+            <a:ext cx="11064240" cy="320040"/>
+          </a:xfrm>
+          <a:prstGeom prst="rect">
+            <a:avLst/>
+          </a:prstGeom>
+          <a:noFill/>
+        </p:spPr>
+        <p:txBody>
+          <a:bodyPr wrap="square">
+            <a:noAutofit/>
+          </a:bodyPr>
+          <a:lstStyle/>
+          <a:p>
+            <a:pPr algn="r">
+              <a:lnSpc>
+                <a:spcPts val="2200"/>
+              </a:lnSpc>
+              <a:defRPr sz="1000" b="0">
+                <a:solidFill>
+                  <a:srgbClr val="666666"/>
+                </a:solidFill>
+                <a:latin typeface="Calibri"/>
+              </a:defRPr>
+            </a:pPr>
+            <a:r>
+              <a:t>learn_floorplanning — 03 bstar tree</a:t>
+            </a:r>
+          </a:p>
+        </p:txBody>
+      </p:sp>
+    </p:spTree>
+  </p:cSld>
+  <p:clrMapOvr>
+    <a:masterClrMapping/>
+  </p:clrMapOvr>
+</p:sld>
+</file>
+
+<file path=ppt/slides/slide13.xml><?xml version="1.0" encoding="utf-8"?>
+<p:sld xmlns:a="http://schemas.openxmlformats.org/drawingml/2006/main" xmlns:p="http://schemas.openxmlformats.org/presentationml/2006/main" xmlns:r="http://schemas.openxmlformats.org/officeDocument/2006/relationships">
+  <p:cSld>
+    <p:spTree>
+      <p:nvGrpSpPr>
+        <p:cNvPr id="1" name=""/>
+        <p:cNvGrpSpPr/>
+        <p:nvPr/>
+      </p:nvGrpSpPr>
+      <p:grpSpPr/>
+      <p:sp>
+        <p:nvSpPr>
+          <p:cNvPr id="2" name="TextBox 1"/>
+          <p:cNvSpPr txBox="1"/>
+          <p:nvPr/>
+        </p:nvSpPr>
+        <p:spPr>
+          <a:xfrm>
+            <a:off x="548640" y="411480"/>
+            <a:ext cx="11064240" cy="777240"/>
+          </a:xfrm>
+          <a:prstGeom prst="rect">
+            <a:avLst/>
+          </a:prstGeom>
+          <a:noFill/>
+        </p:spPr>
+        <p:txBody>
+          <a:bodyPr wrap="square">
+            <a:noAutofit/>
+          </a:bodyPr>
+          <a:lstStyle/>
+          <a:p>
+            <a:pPr>
+              <a:lnSpc>
+                <a:spcPts val="2200"/>
+              </a:lnSpc>
+            </a:pPr>
+            <a:r>
+              <a:rPr sz="2800" b="1">
+                <a:solidFill>
+                  <a:srgbClr val="1A1A2E"/>
+                </a:solidFill>
+                <a:latin typeface="Calibri"/>
+              </a:rPr>
+              <a:t>Your turn</a:t>
+            </a:r>
+          </a:p>
+        </p:txBody>
+      </p:sp>
+      <p:sp>
+        <p:nvSpPr>
+          <p:cNvPr id="3" name="TextBox 2"/>
+          <p:cNvSpPr txBox="1"/>
+          <p:nvPr/>
+        </p:nvSpPr>
+        <p:spPr>
+          <a:xfrm>
+            <a:off x="548640" y="1234440"/>
+            <a:ext cx="11064240" cy="4937760"/>
+          </a:xfrm>
+          <a:prstGeom prst="rect">
+            <a:avLst/>
+          </a:prstGeom>
+          <a:noFill/>
+        </p:spPr>
+        <p:txBody>
+          <a:bodyPr wrap="square">
+            <a:noAutofit/>
+          </a:bodyPr>
+          <a:lstStyle/>
+          <a:p>
+            <a:pPr lvl="0" marL="457200" indent="-228600">
+              <a:buFont typeface="Calibri"/>
+              <a:spcAft>
+                <a:spcPts val="1000"/>
+              </a:spcAft>
+              <a:buSzPct val="100000"/>
+              <a:buChar char="•"/>
+              <a:lnSpc>
+                <a:spcPts val="2200"/>
+              </a:lnSpc>
+            </a:pPr>
+            <a:r>
+              <a:rPr sz="2000" b="0">
+                <a:solidFill>
+                  <a:srgbClr val="333333"/>
+                </a:solidFill>
+                <a:latin typeface="Calibri"/>
+              </a:rPr>
+              <a:t>Produce the legal B-star packing</a:t>
+            </a:r>
+          </a:p>
+          <a:p>
+            <a:pPr lvl="0" marL="457200" indent="-228600">
+              <a:buFont typeface="Calibri"/>
+              <a:spcAft>
+                <a:spcPts val="1000"/>
+              </a:spcAft>
+              <a:buSzPct val="100000"/>
+              <a:buChar char="•"/>
+              <a:lnSpc>
+                <a:spcPts val="2200"/>
+              </a:lnSpc>
+            </a:pPr>
+            <a:r>
+              <a:rPr sz="2000" b="0">
+                <a:solidFill>
+                  <a:srgbClr val="333333"/>
+                </a:solidFill>
+                <a:latin typeface="Calibri"/>
+              </a:rPr>
+              <a:t>Next: sequence-pair permutations as another encoding</a:t>
+            </a:r>
+          </a:p>
+        </p:txBody>
+      </p:sp>
+      <p:sp>
+        <p:nvSpPr>
+          <p:cNvPr id="4" name="TextBox 3"/>
+          <p:cNvSpPr txBox="1"/>
+          <p:nvPr/>
+        </p:nvSpPr>
+        <p:spPr>
+          <a:xfrm>
+            <a:off x="548640" y="6355080"/>
+            <a:ext cx="11064240" cy="320040"/>
+          </a:xfrm>
+          <a:prstGeom prst="rect">
+            <a:avLst/>
+          </a:prstGeom>
+          <a:noFill/>
+        </p:spPr>
+        <p:txBody>
+          <a:bodyPr wrap="square">
+            <a:noAutofit/>
+          </a:bodyPr>
+          <a:lstStyle/>
+          <a:p>
+            <a:pPr algn="r">
+              <a:lnSpc>
+                <a:spcPts val="2200"/>
+              </a:lnSpc>
+              <a:defRPr sz="1000" b="0">
+                <a:solidFill>
+                  <a:srgbClr val="666666"/>
+                </a:solidFill>
+                <a:latin typeface="Calibri"/>
+              </a:defRPr>
+            </a:pPr>
+            <a:r>
+              <a:t>learn_floorplanning — 03 bstar tree</a:t>
+            </a:r>
+          </a:p>
+        </p:txBody>
+      </p:sp>
+    </p:spTree>
+  </p:cSld>
+  <p:clrMapOvr>
+    <a:masterClrMapping/>
+  </p:clrMapOvr>
+</p:sld>
+</file>
+
 <file path=ppt/slides/slide2.xml><?xml version="1.0" encoding="utf-8"?>
+<p:sld xmlns:a="http://schemas.openxmlformats.org/drawingml/2006/main" xmlns:p="http://schemas.openxmlformats.org/presentationml/2006/main" xmlns:r="http://schemas.openxmlformats.org/officeDocument/2006/relationships">
+  <p:cSld>
+    <p:spTree>
+      <p:nvGrpSpPr>
+        <p:cNvPr id="1" name=""/>
+        <p:cNvGrpSpPr/>
+        <p:nvPr/>
+      </p:nvGrpSpPr>
+      <p:grpSpPr/>
+      <p:sp>
+        <p:nvSpPr>
+          <p:cNvPr id="2" name="TextBox 1"/>
+          <p:cNvSpPr txBox="1"/>
+          <p:nvPr/>
+        </p:nvSpPr>
+        <p:spPr>
+          <a:xfrm>
+            <a:off x="548640" y="411480"/>
+            <a:ext cx="11064240" cy="777240"/>
+          </a:xfrm>
+          <a:prstGeom prst="rect">
+            <a:avLst/>
+          </a:prstGeom>
+          <a:noFill/>
+        </p:spPr>
+        <p:txBody>
+          <a:bodyPr wrap="square">
+            <a:noAutofit/>
+          </a:bodyPr>
+          <a:lstStyle/>
+          <a:p>
+            <a:pPr>
+              <a:lnSpc>
+                <a:spcPts val="2200"/>
+              </a:lnSpc>
+            </a:pPr>
+            <a:r>
+              <a:rPr sz="2800" b="1">
+                <a:solidFill>
+                  <a:srgbClr val="1A1A2E"/>
+                </a:solidFill>
+                <a:latin typeface="Calibri"/>
+              </a:rPr>
+              <a:t>Pseudocode</a:t>
+            </a:r>
+          </a:p>
+        </p:txBody>
+      </p:sp>
+      <p:sp>
+        <p:nvSpPr>
+          <p:cNvPr id="3" name="TextBox 2"/>
+          <p:cNvSpPr txBox="1"/>
+          <p:nvPr/>
+        </p:nvSpPr>
+        <p:spPr>
+          <a:xfrm>
+            <a:off x="548640" y="1234440"/>
+            <a:ext cx="11064240" cy="4937760"/>
+          </a:xfrm>
+          <a:prstGeom prst="rect">
+            <a:avLst/>
+          </a:prstGeom>
+          <a:noFill/>
+        </p:spPr>
+        <p:txBody>
+          <a:bodyPr wrap="square">
+            <a:noAutofit/>
+          </a:bodyPr>
+          <a:lstStyle/>
+          <a:p>
+            <a:pPr lvl="0" marL="457200" indent="-228600">
+              <a:buFont typeface="Calibri"/>
+              <a:spcAft>
+                <a:spcPts val="1000"/>
+              </a:spcAft>
+              <a:buSzPct val="100000"/>
+              <a:buChar char="•"/>
+              <a:lnSpc>
+                <a:spcPts val="2200"/>
+              </a:lnSpc>
+            </a:pPr>
+            <a:r>
+              <a:rPr sz="2000" b="0">
+                <a:solidFill>
+                  <a:srgbClr val="333333"/>
+                </a:solidFill>
+                <a:latin typeface="Calibri"/>
+              </a:rPr>
+              <a:t>B-star packing walks the tree with a contour</a:t>
+            </a:r>
+          </a:p>
+          <a:p>
+            <a:pPr lvl="0" marL="457200" indent="-228600">
+              <a:buFont typeface="Calibri"/>
+              <a:spcAft>
+                <a:spcPts val="1000"/>
+              </a:spcAft>
+              <a:buSzPct val="100000"/>
+              <a:buChar char="•"/>
+              <a:lnSpc>
+                <a:spcPts val="2200"/>
+              </a:lnSpc>
+            </a:pPr>
+            <a:r>
+              <a:rPr sz="2000" b="0">
+                <a:solidFill>
+                  <a:srgbClr val="333333"/>
+                </a:solidFill>
+                <a:latin typeface="Calibri"/>
+              </a:rPr>
+              <a:t>Left child sits to the right of the parent</a:t>
+            </a:r>
+          </a:p>
+          <a:p>
+            <a:pPr lvl="0" marL="457200" indent="-228600">
+              <a:buFont typeface="Calibri"/>
+              <a:spcAft>
+                <a:spcPts val="1000"/>
+              </a:spcAft>
+              <a:buSzPct val="100000"/>
+              <a:buChar char="•"/>
+              <a:lnSpc>
+                <a:spcPts val="2200"/>
+              </a:lnSpc>
+            </a:pPr>
+            <a:r>
+              <a:rPr sz="2000" b="0">
+                <a:solidFill>
+                  <a:srgbClr val="333333"/>
+                </a:solidFill>
+                <a:latin typeface="Calibri"/>
+              </a:rPr>
+              <a:t>Open this module's examples file and find the Pseudocode section</a:t>
+            </a:r>
+          </a:p>
+          <a:p>
+            <a:pPr lvl="0" marL="457200" indent="-228600">
+              <a:buFont typeface="Calibri"/>
+              <a:spcAft>
+                <a:spcPts val="1000"/>
+              </a:spcAft>
+              <a:buSzPct val="100000"/>
+              <a:buChar char="•"/>
+              <a:lnSpc>
+                <a:spcPts val="2200"/>
+              </a:lnSpc>
+            </a:pPr>
+            <a:r>
+              <a:rPr sz="2000" b="0">
+                <a:solidFill>
+                  <a:srgbClr val="333333"/>
+                </a:solidFill>
+                <a:latin typeface="Calibri"/>
+              </a:rPr>
+              <a:t>That written sketch is what you implement on the implement track and what the browser</a:t>
+            </a:r>
+          </a:p>
+        </p:txBody>
+      </p:sp>
+      <p:sp>
+        <p:nvSpPr>
+          <p:cNvPr id="4" name="TextBox 3"/>
+          <p:cNvSpPr txBox="1"/>
+          <p:nvPr/>
+        </p:nvSpPr>
+        <p:spPr>
+          <a:xfrm>
+            <a:off x="548640" y="6355080"/>
+            <a:ext cx="11064240" cy="320040"/>
+          </a:xfrm>
+          <a:prstGeom prst="rect">
+            <a:avLst/>
+          </a:prstGeom>
+          <a:noFill/>
+        </p:spPr>
+        <p:txBody>
+          <a:bodyPr wrap="square">
+            <a:noAutofit/>
+          </a:bodyPr>
+          <a:lstStyle/>
+          <a:p>
+            <a:pPr algn="r">
+              <a:lnSpc>
+                <a:spcPts val="2200"/>
+              </a:lnSpc>
+              <a:defRPr sz="1000" b="0">
+                <a:solidFill>
+                  <a:srgbClr val="666666"/>
+                </a:solidFill>
+                <a:latin typeface="Calibri"/>
+              </a:defRPr>
+            </a:pPr>
+            <a:r>
+              <a:t>learn_floorplanning — 03 bstar tree</a:t>
+            </a:r>
+          </a:p>
+        </p:txBody>
+      </p:sp>
+    </p:spTree>
+  </p:cSld>
+  <p:clrMapOvr>
+    <a:masterClrMapping/>
+  </p:clrMapOvr>
+</p:sld>
+</file>
+
+<file path=ppt/slides/slide3.xml><?xml version="1.0" encoding="utf-8"?>
+<p:sld xmlns:a="http://schemas.openxmlformats.org/drawingml/2006/main" xmlns:p="http://schemas.openxmlformats.org/presentationml/2006/main" xmlns:r="http://schemas.openxmlformats.org/officeDocument/2006/relationships">
+  <p:cSld>
+    <p:spTree>
+      <p:nvGrpSpPr>
+        <p:cNvPr id="1" name=""/>
+        <p:cNvGrpSpPr/>
+        <p:nvPr/>
+      </p:nvGrpSpPr>
+      <p:grpSpPr/>
+      <p:sp>
+        <p:nvSpPr>
+          <p:cNvPr id="2" name="TextBox 1"/>
+          <p:cNvSpPr txBox="1"/>
+          <p:nvPr/>
+        </p:nvSpPr>
+        <p:spPr>
+          <a:xfrm>
+            <a:off x="548640" y="411480"/>
+            <a:ext cx="11064240" cy="777240"/>
+          </a:xfrm>
+          <a:prstGeom prst="rect">
+            <a:avLst/>
+          </a:prstGeom>
+          <a:noFill/>
+        </p:spPr>
+        <p:txBody>
+          <a:bodyPr wrap="square">
+            <a:noAutofit/>
+          </a:bodyPr>
+          <a:lstStyle/>
+          <a:p>
+            <a:pPr>
+              <a:lnSpc>
+                <a:spcPts val="2200"/>
+              </a:lnSpc>
+            </a:pPr>
+            <a:r>
+              <a:rPr sz="2800" b="1">
+                <a:solidFill>
+                  <a:srgbClr val="1A1A2E"/>
+                </a:solidFill>
+                <a:latin typeface="Calibri"/>
+              </a:rPr>
+              <a:t>Algorithm sketch</a:t>
+            </a:r>
+          </a:p>
+        </p:txBody>
+      </p:sp>
+      <p:sp>
+        <p:nvSpPr>
+          <p:cNvPr id="3" name="TextBox 2"/>
+          <p:cNvSpPr txBox="1"/>
+          <p:nvPr/>
+        </p:nvSpPr>
+        <p:spPr>
+          <a:xfrm>
+            <a:off x="548640" y="1234440"/>
+            <a:ext cx="11064240" cy="4937760"/>
+          </a:xfrm>
+          <a:prstGeom prst="rect">
+            <a:avLst/>
+          </a:prstGeom>
+          <a:noFill/>
+        </p:spPr>
+        <p:txBody>
+          <a:bodyPr wrap="square">
+            <a:noAutofit/>
+          </a:bodyPr>
+          <a:lstStyle/>
+          <a:p>
+            <a:pPr lvl="0" marL="457200" indent="-228600">
+              <a:buFont typeface="Calibri"/>
+              <a:spcAft>
+                <a:spcPts val="1000"/>
+              </a:spcAft>
+              <a:buSzPct val="100000"/>
+              <a:buChar char="•"/>
+              <a:lnSpc>
+                <a:spcPts val="2200"/>
+              </a:lnSpc>
+            </a:pPr>
+            <a:r>
+              <a:rPr sz="2000" b="0">
+                <a:solidFill>
+                  <a:srgbClr val="333333"/>
+                </a:solidFill>
+                <a:latin typeface="Calibri"/>
+              </a:rPr>
+              <a:t>Golden tree roots A at the origin</a:t>
+            </a:r>
+          </a:p>
+          <a:p>
+            <a:pPr lvl="0" marL="457200" indent="-228600">
+              <a:buFont typeface="Calibri"/>
+              <a:spcAft>
+                <a:spcPts val="1000"/>
+              </a:spcAft>
+              <a:buSzPct val="100000"/>
+              <a:buChar char="•"/>
+              <a:lnSpc>
+                <a:spcPts val="2200"/>
+              </a:lnSpc>
+            </a:pPr>
+            <a:r>
+              <a:rPr sz="2000" b="0">
+                <a:solidFill>
+                  <a:srgbClr val="333333"/>
+                </a:solidFill>
+                <a:latin typeface="Calibri"/>
+              </a:rPr>
+              <a:t>B’s x equals A’s right edge; D’s y is at least A’s height</a:t>
+            </a:r>
+          </a:p>
+          <a:p>
+            <a:pPr lvl="0" marL="457200" indent="-228600">
+              <a:buFont typeface="Calibri"/>
+              <a:spcAft>
+                <a:spcPts val="1000"/>
+              </a:spcAft>
+              <a:buSzPct val="100000"/>
+              <a:buChar char="•"/>
+              <a:lnSpc>
+                <a:spcPts val="2200"/>
+              </a:lnSpc>
+            </a:pPr>
+            <a:r>
+              <a:rPr sz="2000" b="0">
+                <a:solidFill>
+                  <a:srgbClr val="333333"/>
+                </a:solidFill>
+                <a:latin typeface="Calibri"/>
+              </a:rPr>
+              <a:t>The packing must stay legal in the outline</a:t>
+            </a:r>
+          </a:p>
+        </p:txBody>
+      </p:sp>
+      <p:sp>
+        <p:nvSpPr>
+          <p:cNvPr id="4" name="TextBox 3"/>
+          <p:cNvSpPr txBox="1"/>
+          <p:nvPr/>
+        </p:nvSpPr>
+        <p:spPr>
+          <a:xfrm>
+            <a:off x="548640" y="6355080"/>
+            <a:ext cx="11064240" cy="320040"/>
+          </a:xfrm>
+          <a:prstGeom prst="rect">
+            <a:avLst/>
+          </a:prstGeom>
+          <a:noFill/>
+        </p:spPr>
+        <p:txBody>
+          <a:bodyPr wrap="square">
+            <a:noAutofit/>
+          </a:bodyPr>
+          <a:lstStyle/>
+          <a:p>
+            <a:pPr algn="r">
+              <a:lnSpc>
+                <a:spcPts val="2200"/>
+              </a:lnSpc>
+              <a:defRPr sz="1000" b="0">
+                <a:solidFill>
+                  <a:srgbClr val="666666"/>
+                </a:solidFill>
+                <a:latin typeface="Calibri"/>
+              </a:defRPr>
+            </a:pPr>
+            <a:r>
+              <a:t>learn_floorplanning — 03 bstar tree</a:t>
+            </a:r>
+          </a:p>
+        </p:txBody>
+      </p:sp>
+    </p:spTree>
+  </p:cSld>
+  <p:clrMapOvr>
+    <a:masterClrMapping/>
+  </p:clrMapOvr>
+</p:sld>
+</file>
+
+<file path=ppt/slides/slide4.xml><?xml version="1.0" encoding="utf-8"?>
+<p:sld xmlns:a="http://schemas.openxmlformats.org/drawingml/2006/main" xmlns:p="http://schemas.openxmlformats.org/presentationml/2006/main" xmlns:r="http://schemas.openxmlformats.org/officeDocument/2006/relationships">
+  <p:cSld>
+    <p:spTree>
+      <p:nvGrpSpPr>
+        <p:cNvPr id="1" name=""/>
+        <p:cNvGrpSpPr/>
+        <p:nvPr/>
+      </p:nvGrpSpPr>
+      <p:grpSpPr/>
+      <p:sp>
+        <p:nvSpPr>
+          <p:cNvPr id="2" name="TextBox 1"/>
+          <p:cNvSpPr txBox="1"/>
+          <p:nvPr/>
+        </p:nvSpPr>
+        <p:spPr>
+          <a:xfrm>
+            <a:off x="548640" y="411480"/>
+            <a:ext cx="11064240" cy="777240"/>
+          </a:xfrm>
+          <a:prstGeom prst="rect">
+            <a:avLst/>
+          </a:prstGeom>
+          <a:noFill/>
+        </p:spPr>
+        <p:txBody>
+          <a:bodyPr wrap="square">
+            <a:noAutofit/>
+          </a:bodyPr>
+          <a:lstStyle/>
+          <a:p>
+            <a:pPr>
+              <a:lnSpc>
+                <a:spcPts val="2200"/>
+              </a:lnSpc>
+            </a:pPr>
+            <a:r>
+              <a:rPr sz="2800" b="1">
+                <a:solidFill>
+                  <a:srgbClr val="1A1A2E"/>
+                </a:solidFill>
+                <a:latin typeface="Calibri"/>
+              </a:rPr>
+              <a:t>Algorithm sketch — try these</a:t>
+            </a:r>
+          </a:p>
+        </p:txBody>
+      </p:sp>
+      <p:sp>
+        <p:nvSpPr>
+          <p:cNvPr id="3" name="TextBox 2"/>
+          <p:cNvSpPr txBox="1"/>
+          <p:nvPr/>
+        </p:nvSpPr>
+        <p:spPr>
+          <a:xfrm>
+            <a:off x="548640" y="1143000"/>
+            <a:ext cx="11064240" cy="5029200"/>
+          </a:xfrm>
+          <a:prstGeom prst="rect">
+            <a:avLst/>
+          </a:prstGeom>
+          <a:solidFill>
+            <a:srgbClr val="F4F4F4"/>
+          </a:solidFill>
+        </p:spPr>
+        <p:txBody>
+          <a:bodyPr wrap="square">
+            <a:noAutofit/>
+          </a:bodyPr>
+          <a:lstStyle/>
+          <a:p>
+            <a:pPr>
+              <a:lnSpc>
+                <a:spcPts val="2200"/>
+              </a:lnSpc>
+              <a:spcAft>
+                <a:spcPts val="400"/>
+              </a:spcAft>
+            </a:pPr>
+            <a:r>
+              <a:rPr sz="2000" b="0">
+                <a:solidFill>
+                  <a:srgbClr val="333333"/>
+                </a:solidFill>
+                <a:latin typeface="Consolas"/>
+              </a:rPr>
+              <a:t>INPUT: binary tree (left=right-of, right=above)</a:t>
+            </a:r>
+          </a:p>
+          <a:p>
+            <a:pPr>
+              <a:lnSpc>
+                <a:spcPts val="2200"/>
+              </a:lnSpc>
+              <a:spcAft>
+                <a:spcPts val="400"/>
+              </a:spcAft>
+            </a:pPr>
+            <a:r>
+              <a:rPr sz="2000" b="0">
+                <a:solidFill>
+                  <a:srgbClr val="333333"/>
+                </a:solidFill>
+                <a:latin typeface="Consolas"/>
+              </a:rPr>
+              <a:t>OUTPUT: packed (x,y) via contour</a:t>
+            </a:r>
+          </a:p>
+          <a:p>
+            <a:pPr>
+              <a:lnSpc>
+                <a:spcPts val="2200"/>
+              </a:lnSpc>
+              <a:spcAft>
+                <a:spcPts val="400"/>
+              </a:spcAft>
+            </a:pPr>
+            <a:r>
+              <a:rPr sz="2000" b="0">
+                <a:solidFill>
+                  <a:srgbClr val="333333"/>
+                </a:solidFill>
+                <a:latin typeface="Consolas"/>
+              </a:rPr>
+              <a:t>root at (0,0)</a:t>
+            </a:r>
+          </a:p>
+          <a:p>
+            <a:pPr>
+              <a:lnSpc>
+                <a:spcPts val="2200"/>
+              </a:lnSpc>
+              <a:spcAft>
+                <a:spcPts val="400"/>
+              </a:spcAft>
+            </a:pPr>
+            <a:r>
+              <a:rPr sz="2000" b="0">
+                <a:solidFill>
+                  <a:srgbClr val="333333"/>
+                </a:solidFill>
+                <a:latin typeface="Consolas"/>
+              </a:rPr>
+              <a:t>left child: x ← parent.x + parent.w</a:t>
+            </a:r>
+          </a:p>
+          <a:p>
+            <a:pPr>
+              <a:lnSpc>
+                <a:spcPts val="2200"/>
+              </a:lnSpc>
+              <a:spcAft>
+                <a:spcPts val="400"/>
+              </a:spcAft>
+            </a:pPr>
+            <a:r>
+              <a:rPr sz="2000" b="0">
+                <a:solidFill>
+                  <a:srgbClr val="333333"/>
+                </a:solidFill>
+                <a:latin typeface="Consolas"/>
+              </a:rPr>
+              <a:t>right child: y ← above parent (contour)</a:t>
+            </a:r>
+          </a:p>
+          <a:p>
+            <a:pPr>
+              <a:lnSpc>
+                <a:spcPts val="2200"/>
+              </a:lnSpc>
+              <a:spcAft>
+                <a:spcPts val="400"/>
+              </a:spcAft>
+            </a:pPr>
+            <a:r>
+              <a:rPr sz="2000" b="0">
+                <a:solidFill>
+                  <a:srgbClr val="333333"/>
+                </a:solidFill>
+                <a:latin typeface="Consolas"/>
+              </a:rPr>
+              <a:t>update horizontal contour after each place</a:t>
+            </a:r>
+          </a:p>
+          <a:p>
+            <a:pPr>
+              <a:lnSpc>
+                <a:spcPts val="2200"/>
+              </a:lnSpc>
+              <a:spcAft>
+                <a:spcPts val="400"/>
+              </a:spcAft>
+            </a:pPr>
+            <a:r>
+              <a:rPr sz="2000" b="0">
+                <a:solidFill>
+                  <a:srgbClr val="333333"/>
+                </a:solidFill>
+                <a:latin typeface="Consolas"/>
+              </a:rPr>
+              <a:t>GOLDEN: A@0,0; B.x=A.x+A.w; D.y≥A.h; legal</a:t>
+            </a:r>
+          </a:p>
+        </p:txBody>
+      </p:sp>
+      <p:sp>
+        <p:nvSpPr>
+          <p:cNvPr id="4" name="TextBox 3"/>
+          <p:cNvSpPr txBox="1"/>
+          <p:nvPr/>
+        </p:nvSpPr>
+        <p:spPr>
+          <a:xfrm>
+            <a:off x="548640" y="6355080"/>
+            <a:ext cx="11064240" cy="320040"/>
+          </a:xfrm>
+          <a:prstGeom prst="rect">
+            <a:avLst/>
+          </a:prstGeom>
+          <a:noFill/>
+        </p:spPr>
+        <p:txBody>
+          <a:bodyPr wrap="square">
+            <a:noAutofit/>
+          </a:bodyPr>
+          <a:lstStyle/>
+          <a:p>
+            <a:pPr algn="r">
+              <a:lnSpc>
+                <a:spcPts val="2200"/>
+              </a:lnSpc>
+              <a:defRPr sz="1000" b="0">
+                <a:solidFill>
+                  <a:srgbClr val="666666"/>
+                </a:solidFill>
+                <a:latin typeface="Calibri"/>
+              </a:defRPr>
+            </a:pPr>
+            <a:r>
+              <a:t>learn_floorplanning — 03 bstar tree</a:t>
+            </a:r>
+          </a:p>
+        </p:txBody>
+      </p:sp>
+    </p:spTree>
+  </p:cSld>
+  <p:clrMapOvr>
+    <a:masterClrMapping/>
+  </p:clrMapOvr>
+</p:sld>
+</file>
+
+<file path=ppt/slides/slide5.xml><?xml version="1.0" encoding="utf-8"?>
 <p:sld xmlns:a="http://schemas.openxmlformats.org/drawingml/2006/main" xmlns:p="http://schemas.openxmlformats.org/presentationml/2006/main" xmlns:r="http://schemas.openxmlformats.org/officeDocument/2006/relationships">
   <p:cSld>
     <p:spTree>
@@ -4589,7 +5839,7 @@
 </p:sld>
 </file>
 
-<file path=ppt/slides/slide3.xml><?xml version="1.0" encoding="utf-8"?>
+<file path=ppt/slides/slide6.xml><?xml version="1.0" encoding="utf-8"?>
 <p:sld xmlns:a="http://schemas.openxmlformats.org/drawingml/2006/main" xmlns:p="http://schemas.openxmlformats.org/presentationml/2006/main" xmlns:r="http://schemas.openxmlformats.org/officeDocument/2006/relationships">
   <p:cSld>
     <p:spTree>
@@ -4748,7 +5998,7 @@
 </p:sld>
 </file>
 
-<file path=ppt/slides/slide4.xml><?xml version="1.0" encoding="utf-8"?>
+<file path=ppt/slides/slide7.xml><?xml version="1.0" encoding="utf-8"?>
 <p:sld xmlns:a="http://schemas.openxmlformats.org/drawingml/2006/main" xmlns:p="http://schemas.openxmlformats.org/presentationml/2006/main" xmlns:r="http://schemas.openxmlformats.org/officeDocument/2006/relationships">
   <p:cSld>
     <p:spTree>
@@ -4907,7 +6157,7 @@
 </p:sld>
 </file>
 
-<file path=ppt/slides/slide5.xml><?xml version="1.0" encoding="utf-8"?>
+<file path=ppt/slides/slide8.xml><?xml version="1.0" encoding="utf-8"?>
 <p:sld xmlns:a="http://schemas.openxmlformats.org/drawingml/2006/main" xmlns:p="http://schemas.openxmlformats.org/presentationml/2006/main" xmlns:r="http://schemas.openxmlformats.org/officeDocument/2006/relationships">
   <p:cSld>
     <p:spTree>
@@ -5066,7 +6316,7 @@
 </p:sld>
 </file>
 
-<file path=ppt/slides/slide6.xml><?xml version="1.0" encoding="utf-8"?>
+<file path=ppt/slides/slide9.xml><?xml version="1.0" encoding="utf-8"?>
 <p:sld xmlns:a="http://schemas.openxmlformats.org/drawingml/2006/main" xmlns:p="http://schemas.openxmlformats.org/presentationml/2006/main" xmlns:r="http://schemas.openxmlformats.org/officeDocument/2006/relationships">
   <p:cSld>
     <p:spTree>
@@ -5181,473 +6431,6 @@
       <p:sp>
         <p:nvSpPr>
           <p:cNvPr id="5" name="TextBox 4"/>
-          <p:cNvSpPr txBox="1"/>
-          <p:nvPr/>
-        </p:nvSpPr>
-        <p:spPr>
-          <a:xfrm>
-            <a:off x="548640" y="6355080"/>
-            <a:ext cx="11064240" cy="320040"/>
-          </a:xfrm>
-          <a:prstGeom prst="rect">
-            <a:avLst/>
-          </a:prstGeom>
-          <a:noFill/>
-        </p:spPr>
-        <p:txBody>
-          <a:bodyPr wrap="square">
-            <a:noAutofit/>
-          </a:bodyPr>
-          <a:lstStyle/>
-          <a:p>
-            <a:pPr algn="r">
-              <a:lnSpc>
-                <a:spcPts val="2200"/>
-              </a:lnSpc>
-              <a:defRPr sz="1000" b="0">
-                <a:solidFill>
-                  <a:srgbClr val="666666"/>
-                </a:solidFill>
-                <a:latin typeface="Calibri"/>
-              </a:defRPr>
-            </a:pPr>
-            <a:r>
-              <a:t>learn_floorplanning — 03 bstar tree</a:t>
-            </a:r>
-          </a:p>
-        </p:txBody>
-      </p:sp>
-    </p:spTree>
-  </p:cSld>
-  <p:clrMapOvr>
-    <a:masterClrMapping/>
-  </p:clrMapOvr>
-</p:sld>
-</file>
-
-<file path=ppt/slides/slide7.xml><?xml version="1.0" encoding="utf-8"?>
-<p:sld xmlns:a="http://schemas.openxmlformats.org/drawingml/2006/main" xmlns:p="http://schemas.openxmlformats.org/presentationml/2006/main" xmlns:r="http://schemas.openxmlformats.org/officeDocument/2006/relationships">
-  <p:cSld>
-    <p:spTree>
-      <p:nvGrpSpPr>
-        <p:cNvPr id="1" name=""/>
-        <p:cNvGrpSpPr/>
-        <p:nvPr/>
-      </p:nvGrpSpPr>
-      <p:grpSpPr/>
-      <p:sp>
-        <p:nvSpPr>
-          <p:cNvPr id="2" name="TextBox 1"/>
-          <p:cNvSpPr txBox="1"/>
-          <p:nvPr/>
-        </p:nvSpPr>
-        <p:spPr>
-          <a:xfrm>
-            <a:off x="548640" y="411480"/>
-            <a:ext cx="11064240" cy="777240"/>
-          </a:xfrm>
-          <a:prstGeom prst="rect">
-            <a:avLst/>
-          </a:prstGeom>
-          <a:noFill/>
-        </p:spPr>
-        <p:txBody>
-          <a:bodyPr wrap="square">
-            <a:noAutofit/>
-          </a:bodyPr>
-          <a:lstStyle/>
-          <a:p>
-            <a:pPr>
-              <a:lnSpc>
-                <a:spcPts val="2200"/>
-              </a:lnSpc>
-            </a:pPr>
-            <a:r>
-              <a:rPr sz="2800" b="1">
-                <a:solidFill>
-                  <a:srgbClr val="1A1A2E"/>
-                </a:solidFill>
-                <a:latin typeface="Calibri"/>
-              </a:rPr>
-              <a:t>Browser lab track</a:t>
-            </a:r>
-          </a:p>
-        </p:txBody>
-      </p:sp>
-      <p:sp>
-        <p:nvSpPr>
-          <p:cNvPr id="3" name="TextBox 2"/>
-          <p:cNvSpPr txBox="1"/>
-          <p:nvPr/>
-        </p:nvSpPr>
-        <p:spPr>
-          <a:xfrm>
-            <a:off x="548640" y="1234440"/>
-            <a:ext cx="11064240" cy="4937760"/>
-          </a:xfrm>
-          <a:prstGeom prst="rect">
-            <a:avLst/>
-          </a:prstGeom>
-          <a:noFill/>
-        </p:spPr>
-        <p:txBody>
-          <a:bodyPr wrap="square">
-            <a:noAutofit/>
-          </a:bodyPr>
-          <a:lstStyle/>
-          <a:p>
-            <a:pPr lvl="0" marL="457200" indent="-228600">
-              <a:buFont typeface="Calibri"/>
-              <a:spcAft>
-                <a:spcPts val="1000"/>
-              </a:spcAft>
-              <a:buSzPct val="100000"/>
-              <a:buChar char="•"/>
-              <a:lnSpc>
-                <a:spcPts val="2200"/>
-              </a:lnSpc>
-            </a:pPr>
-            <a:r>
-              <a:rPr sz="2000" b="0">
-                <a:solidFill>
-                  <a:srgbClr val="333333"/>
-                </a:solidFill>
-                <a:latin typeface="Calibri"/>
-              </a:rPr>
-              <a:t>Open bstar-tree and Pack B*-tree</a:t>
-            </a:r>
-          </a:p>
-          <a:p>
-            <a:pPr lvl="0" marL="457200" indent="-228600">
-              <a:buFont typeface="Calibri"/>
-              <a:spcAft>
-                <a:spcPts val="1000"/>
-              </a:spcAft>
-              <a:buSzPct val="100000"/>
-              <a:buChar char="•"/>
-              <a:lnSpc>
-                <a:spcPts val="2200"/>
-              </a:lnSpc>
-            </a:pPr>
-            <a:r>
-              <a:rPr sz="2000" b="0">
-                <a:solidFill>
-                  <a:srgbClr val="333333"/>
-                </a:solidFill>
-                <a:latin typeface="Calibri"/>
-              </a:rPr>
-              <a:t>Confirm A at zero comma zero, B at x equals three, D above A</a:t>
-            </a:r>
-          </a:p>
-        </p:txBody>
-      </p:sp>
-      <p:sp>
-        <p:nvSpPr>
-          <p:cNvPr id="4" name="TextBox 3"/>
-          <p:cNvSpPr txBox="1"/>
-          <p:nvPr/>
-        </p:nvSpPr>
-        <p:spPr>
-          <a:xfrm>
-            <a:off x="548640" y="6355080"/>
-            <a:ext cx="11064240" cy="320040"/>
-          </a:xfrm>
-          <a:prstGeom prst="rect">
-            <a:avLst/>
-          </a:prstGeom>
-          <a:noFill/>
-        </p:spPr>
-        <p:txBody>
-          <a:bodyPr wrap="square">
-            <a:noAutofit/>
-          </a:bodyPr>
-          <a:lstStyle/>
-          <a:p>
-            <a:pPr algn="r">
-              <a:lnSpc>
-                <a:spcPts val="2200"/>
-              </a:lnSpc>
-              <a:defRPr sz="1000" b="0">
-                <a:solidFill>
-                  <a:srgbClr val="666666"/>
-                </a:solidFill>
-                <a:latin typeface="Calibri"/>
-              </a:defRPr>
-            </a:pPr>
-            <a:r>
-              <a:t>learn_floorplanning — 03 bstar tree</a:t>
-            </a:r>
-          </a:p>
-        </p:txBody>
-      </p:sp>
-    </p:spTree>
-  </p:cSld>
-  <p:clrMapOvr>
-    <a:masterClrMapping/>
-  </p:clrMapOvr>
-</p:sld>
-</file>
-
-<file path=ppt/slides/slide8.xml><?xml version="1.0" encoding="utf-8"?>
-<p:sld xmlns:a="http://schemas.openxmlformats.org/drawingml/2006/main" xmlns:p="http://schemas.openxmlformats.org/presentationml/2006/main" xmlns:r="http://schemas.openxmlformats.org/officeDocument/2006/relationships">
-  <p:cSld>
-    <p:spTree>
-      <p:nvGrpSpPr>
-        <p:cNvPr id="1" name=""/>
-        <p:cNvGrpSpPr/>
-        <p:nvPr/>
-      </p:nvGrpSpPr>
-      <p:grpSpPr/>
-      <p:sp>
-        <p:nvSpPr>
-          <p:cNvPr id="2" name="TextBox 1"/>
-          <p:cNvSpPr txBox="1"/>
-          <p:nvPr/>
-        </p:nvSpPr>
-        <p:spPr>
-          <a:xfrm>
-            <a:off x="548640" y="411480"/>
-            <a:ext cx="11064240" cy="777240"/>
-          </a:xfrm>
-          <a:prstGeom prst="rect">
-            <a:avLst/>
-          </a:prstGeom>
-          <a:noFill/>
-        </p:spPr>
-        <p:txBody>
-          <a:bodyPr wrap="square">
-            <a:noAutofit/>
-          </a:bodyPr>
-          <a:lstStyle/>
-          <a:p>
-            <a:pPr>
-              <a:lnSpc>
-                <a:spcPts val="2200"/>
-              </a:lnSpc>
-            </a:pPr>
-            <a:r>
-              <a:rPr sz="2800" b="1">
-                <a:solidFill>
-                  <a:srgbClr val="1A1A2E"/>
-                </a:solidFill>
-                <a:latin typeface="Calibri"/>
-              </a:rPr>
-              <a:t>Implement track</a:t>
-            </a:r>
-          </a:p>
-        </p:txBody>
-      </p:sp>
-      <p:sp>
-        <p:nvSpPr>
-          <p:cNvPr id="3" name="TextBox 2"/>
-          <p:cNvSpPr txBox="1"/>
-          <p:nvPr/>
-        </p:nvSpPr>
-        <p:spPr>
-          <a:xfrm>
-            <a:off x="548640" y="1234440"/>
-            <a:ext cx="11064240" cy="4937760"/>
-          </a:xfrm>
-          <a:prstGeom prst="rect">
-            <a:avLst/>
-          </a:prstGeom>
-          <a:noFill/>
-        </p:spPr>
-        <p:txBody>
-          <a:bodyPr wrap="square">
-            <a:noAutofit/>
-          </a:bodyPr>
-          <a:lstStyle/>
-          <a:p>
-            <a:pPr lvl="0" marL="457200" indent="-228600">
-              <a:buFont typeface="Calibri"/>
-              <a:spcAft>
-                <a:spcPts val="1000"/>
-              </a:spcAft>
-              <a:buSzPct val="100000"/>
-              <a:buChar char="•"/>
-              <a:lnSpc>
-                <a:spcPts val="2200"/>
-              </a:lnSpc>
-            </a:pPr>
-            <a:r>
-              <a:rPr sz="2000" b="0">
-                <a:solidFill>
-                  <a:srgbClr val="333333"/>
-                </a:solidFill>
-                <a:latin typeface="Calibri"/>
-              </a:rPr>
-              <a:t>Build the golden tree and contour-pack it</a:t>
-            </a:r>
-          </a:p>
-          <a:p>
-            <a:pPr lvl="0" marL="457200" indent="-228600">
-              <a:buFont typeface="Calibri"/>
-              <a:spcAft>
-                <a:spcPts val="1000"/>
-              </a:spcAft>
-              <a:buSzPct val="100000"/>
-              <a:buChar char="•"/>
-              <a:lnSpc>
-                <a:spcPts val="2200"/>
-              </a:lnSpc>
-            </a:pPr>
-            <a:r>
-              <a:rPr sz="2000" b="0">
-                <a:solidFill>
-                  <a:srgbClr val="333333"/>
-                </a:solidFill>
-                <a:latin typeface="Calibri"/>
-              </a:rPr>
-              <a:t>Assert A at (0,0), B.x equals A.x plus A.w, D.y at least A.h, and legality true</a:t>
-            </a:r>
-          </a:p>
-        </p:txBody>
-      </p:sp>
-      <p:sp>
-        <p:nvSpPr>
-          <p:cNvPr id="4" name="TextBox 3"/>
-          <p:cNvSpPr txBox="1"/>
-          <p:nvPr/>
-        </p:nvSpPr>
-        <p:spPr>
-          <a:xfrm>
-            <a:off x="548640" y="6355080"/>
-            <a:ext cx="11064240" cy="320040"/>
-          </a:xfrm>
-          <a:prstGeom prst="rect">
-            <a:avLst/>
-          </a:prstGeom>
-          <a:noFill/>
-        </p:spPr>
-        <p:txBody>
-          <a:bodyPr wrap="square">
-            <a:noAutofit/>
-          </a:bodyPr>
-          <a:lstStyle/>
-          <a:p>
-            <a:pPr algn="r">
-              <a:lnSpc>
-                <a:spcPts val="2200"/>
-              </a:lnSpc>
-              <a:defRPr sz="1000" b="0">
-                <a:solidFill>
-                  <a:srgbClr val="666666"/>
-                </a:solidFill>
-                <a:latin typeface="Calibri"/>
-              </a:defRPr>
-            </a:pPr>
-            <a:r>
-              <a:t>learn_floorplanning — 03 bstar tree</a:t>
-            </a:r>
-          </a:p>
-        </p:txBody>
-      </p:sp>
-    </p:spTree>
-  </p:cSld>
-  <p:clrMapOvr>
-    <a:masterClrMapping/>
-  </p:clrMapOvr>
-</p:sld>
-</file>
-
-<file path=ppt/slides/slide9.xml><?xml version="1.0" encoding="utf-8"?>
-<p:sld xmlns:a="http://schemas.openxmlformats.org/drawingml/2006/main" xmlns:p="http://schemas.openxmlformats.org/presentationml/2006/main" xmlns:r="http://schemas.openxmlformats.org/officeDocument/2006/relationships">
-  <p:cSld>
-    <p:spTree>
-      <p:nvGrpSpPr>
-        <p:cNvPr id="1" name=""/>
-        <p:cNvGrpSpPr/>
-        <p:nvPr/>
-      </p:nvGrpSpPr>
-      <p:grpSpPr/>
-      <p:sp>
-        <p:nvSpPr>
-          <p:cNvPr id="2" name="TextBox 1"/>
-          <p:cNvSpPr txBox="1"/>
-          <p:nvPr/>
-        </p:nvSpPr>
-        <p:spPr>
-          <a:xfrm>
-            <a:off x="548640" y="411480"/>
-            <a:ext cx="11064240" cy="777240"/>
-          </a:xfrm>
-          <a:prstGeom prst="rect">
-            <a:avLst/>
-          </a:prstGeom>
-          <a:noFill/>
-        </p:spPr>
-        <p:txBody>
-          <a:bodyPr wrap="square">
-            <a:noAutofit/>
-          </a:bodyPr>
-          <a:lstStyle/>
-          <a:p>
-            <a:pPr>
-              <a:lnSpc>
-                <a:spcPts val="2200"/>
-              </a:lnSpc>
-            </a:pPr>
-            <a:r>
-              <a:rPr sz="2800" b="1">
-                <a:solidFill>
-                  <a:srgbClr val="1A1A2E"/>
-                </a:solidFill>
-                <a:latin typeface="Calibri"/>
-              </a:rPr>
-              <a:t>Pitfalls</a:t>
-            </a:r>
-          </a:p>
-        </p:txBody>
-      </p:sp>
-      <p:sp>
-        <p:nvSpPr>
-          <p:cNvPr id="3" name="TextBox 2"/>
-          <p:cNvSpPr txBox="1"/>
-          <p:nvPr/>
-        </p:nvSpPr>
-        <p:spPr>
-          <a:xfrm>
-            <a:off x="548640" y="1234440"/>
-            <a:ext cx="11064240" cy="4937760"/>
-          </a:xfrm>
-          <a:prstGeom prst="rect">
-            <a:avLst/>
-          </a:prstGeom>
-          <a:noFill/>
-        </p:spPr>
-        <p:txBody>
-          <a:bodyPr wrap="square">
-            <a:noAutofit/>
-          </a:bodyPr>
-          <a:lstStyle/>
-          <a:p>
-            <a:pPr lvl="0" marL="457200" indent="-228600">
-              <a:buFont typeface="Calibri"/>
-              <a:spcAft>
-                <a:spcPts val="1000"/>
-              </a:spcAft>
-              <a:buSzPct val="100000"/>
-              <a:buChar char="•"/>
-              <a:lnSpc>
-                <a:spcPts val="2200"/>
-              </a:lnSpc>
-            </a:pPr>
-            <a:r>
-              <a:rPr sz="2000" b="0">
-                <a:solidFill>
-                  <a:srgbClr val="333333"/>
-                </a:solidFill>
-                <a:latin typeface="Calibri"/>
-              </a:rPr>
-              <a:t>Reversing left/right geometry; stale contour segments; treating the tree as a netlist</a:t>
-            </a:r>
-          </a:p>
-        </p:txBody>
-      </p:sp>
-      <p:sp>
-        <p:nvSpPr>
-          <p:cNvPr id="4" name="TextBox 3"/>
           <p:cNvSpPr txBox="1"/>
           <p:nvPr/>
         </p:nvSpPr>
